--- a/Prezentare.pptx
+++ b/Prezentare.pptx
@@ -1,43 +1,43 @@
 
 <file path=ppt/presentation.xml><?xml version="1.0" encoding="utf-8"?>
-<p:presentation xmlns:a="http://schemas.openxmlformats.org/drawingml/2006/main" xmlns:r="http://schemas.openxmlformats.org/officeDocument/2006/relationships" xmlns:p="http://schemas.openxmlformats.org/presentationml/2006/main" saveSubsetFonts="1" embedTrueTypeFonts="true">
+<p:presentation xmlns:a="http://schemas.openxmlformats.org/drawingml/2006/main" xmlns:r="http://schemas.openxmlformats.org/officeDocument/2006/relationships" xmlns:p="http://schemas.openxmlformats.org/presentationml/2006/main" embedTrueTypeFonts="1" saveSubsetFonts="1">
   <p:sldMasterIdLst>
     <p:sldMasterId id="2147483648" r:id="rId1"/>
   </p:sldMasterIdLst>
   <p:sldIdLst>
-    <p:sldId id="256" r:id="rId6"/>
-    <p:sldId id="257" r:id="rId7"/>
-    <p:sldId id="258" r:id="rId8"/>
-    <p:sldId id="259" r:id="rId9"/>
-    <p:sldId id="260" r:id="rId10"/>
-    <p:sldId id="261" r:id="rId11"/>
-    <p:sldId id="262" r:id="rId12"/>
-    <p:sldId id="263" r:id="rId13"/>
-    <p:sldId id="264" r:id="rId14"/>
-    <p:sldId id="265" r:id="rId15"/>
+    <p:sldId id="256" r:id="rId2"/>
+    <p:sldId id="257" r:id="rId3"/>
+    <p:sldId id="258" r:id="rId4"/>
+    <p:sldId id="259" r:id="rId5"/>
+    <p:sldId id="260" r:id="rId6"/>
+    <p:sldId id="261" r:id="rId7"/>
+    <p:sldId id="262" r:id="rId8"/>
+    <p:sldId id="263" r:id="rId9"/>
+    <p:sldId id="264" r:id="rId10"/>
+    <p:sldId id="265" r:id="rId11"/>
   </p:sldIdLst>
   <p:sldSz cx="18288000" cy="10287000"/>
   <p:notesSz cx="6858000" cy="9144000"/>
   <p:embeddedFontLst>
     <p:embeddedFont>
-      <p:font typeface="Neue Montreal Medium" charset="1" panose="00000400000000000000"/>
-      <p:regular r:id="rId16"/>
+      <p:font typeface="Archivo Black" panose="020B0604020202020204" charset="0"/>
+      <p:regular r:id="rId12"/>
     </p:embeddedFont>
     <p:embeddedFont>
-      <p:font typeface="Neue Montreal" charset="1" panose="00000400000000000000"/>
-      <p:regular r:id="rId17"/>
+      <p:font typeface="Gagalin" panose="020B0604020202020204" charset="0"/>
+      <p:regular r:id="rId13"/>
     </p:embeddedFont>
     <p:embeddedFont>
-      <p:font typeface="Gagalin" charset="1" panose="00000500000000000000"/>
-      <p:regular r:id="rId18"/>
+      <p:font typeface="Neue Montreal" panose="020B0604020202020204" charset="0"/>
+      <p:regular r:id="rId14"/>
     </p:embeddedFont>
     <p:embeddedFont>
-      <p:font typeface="Neue Montreal Bold" charset="1" panose="00000400000000000000"/>
-      <p:regular r:id="rId19"/>
+      <p:font typeface="Neue Montreal Bold" panose="020B0604020202020204" charset="0"/>
+      <p:regular r:id="rId15"/>
     </p:embeddedFont>
     <p:embeddedFont>
-      <p:font typeface="Archivo Black" charset="1" panose="020B0A03020202020B04"/>
-      <p:regular r:id="rId20"/>
+      <p:font typeface="Neue Montreal Medium" panose="020B0604020202020204" charset="0"/>
+      <p:regular r:id="rId16"/>
     </p:embeddedFont>
   </p:embeddedFontLst>
   <p:defaultTextStyle>
@@ -135,6 +135,22 @@
       </a:defRPr>
     </a:lvl9pPr>
   </p:defaultTextStyle>
+  <p:extLst>
+    <p:ext uri="{EFAFB233-063F-42B5-8137-9DF3F51BA10A}">
+      <p15:sldGuideLst xmlns:p15="http://schemas.microsoft.com/office/powerpoint/2012/main">
+        <p15:guide id="1" orient="horz" pos="2160">
+          <p15:clr>
+            <a:srgbClr val="A4A3A4"/>
+          </p15:clr>
+        </p15:guide>
+        <p15:guide id="2" pos="2880">
+          <p15:clr>
+            <a:srgbClr val="A4A3A4"/>
+          </p15:clr>
+        </p15:guide>
+      </p15:sldGuideLst>
+    </p:ext>
+  </p:extLst>
 </p:presentation>
 </file>
 
@@ -176,10 +192,9 @@
           <a:lstStyle/>
           <a:p>
             <a:r>
-              <a:rPr lang="en-US" smtClean="0"/>
+              <a:rPr lang="en-US"/>
               <a:t>Click to edit Master title style</a:t>
             </a:r>
-            <a:endParaRPr lang="en-US"/>
           </a:p>
         </p:txBody>
       </p:sp>
@@ -295,10 +310,9 @@
           </a:lstStyle>
           <a:p>
             <a:r>
-              <a:rPr lang="en-US" smtClean="0"/>
+              <a:rPr lang="en-US"/>
               <a:t>Click to edit Master subtitle style</a:t>
             </a:r>
-            <a:endParaRPr lang="en-US"/>
           </a:p>
         </p:txBody>
       </p:sp>
@@ -320,7 +334,7 @@
             <a:fld id="{1D8BD707-D9CF-40AE-B4C6-C98DA3205C09}" type="datetimeFigureOut">
               <a:rPr lang="en-US" smtClean="0"/>
               <a:pPr/>
-              <a:t>8/1/2011</a:t>
+              <a:t>5/27/2025</a:t>
             </a:fld>
             <a:endParaRPr lang="en-US"/>
           </a:p>
@@ -410,10 +424,9 @@
           <a:lstStyle/>
           <a:p>
             <a:r>
-              <a:rPr lang="en-US" smtClean="0"/>
+              <a:rPr lang="en-US"/>
               <a:t>Click to edit Master title style</a:t>
             </a:r>
-            <a:endParaRPr lang="en-US"/>
           </a:p>
         </p:txBody>
       </p:sp>
@@ -434,38 +447,37 @@
           <a:p>
             <a:pPr lvl="0"/>
             <a:r>
-              <a:rPr lang="en-US" smtClean="0"/>
+              <a:rPr lang="en-US"/>
               <a:t>Click to edit Master text styles</a:t>
             </a:r>
           </a:p>
           <a:p>
             <a:pPr lvl="1"/>
             <a:r>
-              <a:rPr lang="en-US" smtClean="0"/>
+              <a:rPr lang="en-US"/>
               <a:t>Second level</a:t>
             </a:r>
           </a:p>
           <a:p>
             <a:pPr lvl="2"/>
             <a:r>
-              <a:rPr lang="en-US" smtClean="0"/>
+              <a:rPr lang="en-US"/>
               <a:t>Third level</a:t>
             </a:r>
           </a:p>
           <a:p>
             <a:pPr lvl="3"/>
             <a:r>
-              <a:rPr lang="en-US" smtClean="0"/>
+              <a:rPr lang="en-US"/>
               <a:t>Fourth level</a:t>
             </a:r>
           </a:p>
           <a:p>
             <a:pPr lvl="4"/>
             <a:r>
-              <a:rPr lang="en-US" smtClean="0"/>
+              <a:rPr lang="en-US"/>
               <a:t>Fifth level</a:t>
             </a:r>
-            <a:endParaRPr lang="en-US"/>
           </a:p>
         </p:txBody>
       </p:sp>
@@ -487,7 +499,7 @@
             <a:fld id="{1D8BD707-D9CF-40AE-B4C6-C98DA3205C09}" type="datetimeFigureOut">
               <a:rPr lang="en-US" smtClean="0"/>
               <a:pPr/>
-              <a:t>8/1/2011</a:t>
+              <a:t>5/27/2025</a:t>
             </a:fld>
             <a:endParaRPr lang="en-US"/>
           </a:p>
@@ -582,10 +594,9 @@
           <a:lstStyle/>
           <a:p>
             <a:r>
-              <a:rPr lang="en-US" smtClean="0"/>
+              <a:rPr lang="en-US"/>
               <a:t>Click to edit Master title style</a:t>
             </a:r>
-            <a:endParaRPr lang="en-US"/>
           </a:p>
         </p:txBody>
       </p:sp>
@@ -611,38 +622,37 @@
           <a:p>
             <a:pPr lvl="0"/>
             <a:r>
-              <a:rPr lang="en-US" smtClean="0"/>
+              <a:rPr lang="en-US"/>
               <a:t>Click to edit Master text styles</a:t>
             </a:r>
           </a:p>
           <a:p>
             <a:pPr lvl="1"/>
             <a:r>
-              <a:rPr lang="en-US" smtClean="0"/>
+              <a:rPr lang="en-US"/>
               <a:t>Second level</a:t>
             </a:r>
           </a:p>
           <a:p>
             <a:pPr lvl="2"/>
             <a:r>
-              <a:rPr lang="en-US" smtClean="0"/>
+              <a:rPr lang="en-US"/>
               <a:t>Third level</a:t>
             </a:r>
           </a:p>
           <a:p>
             <a:pPr lvl="3"/>
             <a:r>
-              <a:rPr lang="en-US" smtClean="0"/>
+              <a:rPr lang="en-US"/>
               <a:t>Fourth level</a:t>
             </a:r>
           </a:p>
           <a:p>
             <a:pPr lvl="4"/>
             <a:r>
-              <a:rPr lang="en-US" smtClean="0"/>
+              <a:rPr lang="en-US"/>
               <a:t>Fifth level</a:t>
             </a:r>
-            <a:endParaRPr lang="en-US"/>
           </a:p>
         </p:txBody>
       </p:sp>
@@ -664,7 +674,7 @@
             <a:fld id="{1D8BD707-D9CF-40AE-B4C6-C98DA3205C09}" type="datetimeFigureOut">
               <a:rPr lang="en-US" smtClean="0"/>
               <a:pPr/>
-              <a:t>8/1/2011</a:t>
+              <a:t>5/27/2025</a:t>
             </a:fld>
             <a:endParaRPr lang="en-US"/>
           </a:p>
@@ -754,10 +764,9 @@
           <a:lstStyle/>
           <a:p>
             <a:r>
-              <a:rPr lang="en-US" smtClean="0"/>
+              <a:rPr lang="en-US"/>
               <a:t>Click to edit Master title style</a:t>
             </a:r>
-            <a:endParaRPr lang="en-US"/>
           </a:p>
         </p:txBody>
       </p:sp>
@@ -778,38 +787,37 @@
           <a:p>
             <a:pPr lvl="0"/>
             <a:r>
-              <a:rPr lang="en-US" smtClean="0"/>
+              <a:rPr lang="en-US"/>
               <a:t>Click to edit Master text styles</a:t>
             </a:r>
           </a:p>
           <a:p>
             <a:pPr lvl="1"/>
             <a:r>
-              <a:rPr lang="en-US" smtClean="0"/>
+              <a:rPr lang="en-US"/>
               <a:t>Second level</a:t>
             </a:r>
           </a:p>
           <a:p>
             <a:pPr lvl="2"/>
             <a:r>
-              <a:rPr lang="en-US" smtClean="0"/>
+              <a:rPr lang="en-US"/>
               <a:t>Third level</a:t>
             </a:r>
           </a:p>
           <a:p>
             <a:pPr lvl="3"/>
             <a:r>
-              <a:rPr lang="en-US" smtClean="0"/>
+              <a:rPr lang="en-US"/>
               <a:t>Fourth level</a:t>
             </a:r>
           </a:p>
           <a:p>
             <a:pPr lvl="4"/>
             <a:r>
-              <a:rPr lang="en-US" smtClean="0"/>
+              <a:rPr lang="en-US"/>
               <a:t>Fifth level</a:t>
             </a:r>
-            <a:endParaRPr lang="en-US"/>
           </a:p>
         </p:txBody>
       </p:sp>
@@ -831,7 +839,7 @@
             <a:fld id="{1D8BD707-D9CF-40AE-B4C6-C98DA3205C09}" type="datetimeFigureOut">
               <a:rPr lang="en-US" smtClean="0"/>
               <a:pPr/>
-              <a:t>8/1/2011</a:t>
+              <a:t>5/27/2025</a:t>
             </a:fld>
             <a:endParaRPr lang="en-US"/>
           </a:p>
@@ -930,10 +938,9 @@
           </a:lstStyle>
           <a:p>
             <a:r>
-              <a:rPr lang="en-US" smtClean="0"/>
+              <a:rPr lang="en-US"/>
               <a:t>Click to edit Master title style</a:t>
             </a:r>
-            <a:endParaRPr lang="en-US"/>
           </a:p>
         </p:txBody>
       </p:sp>
@@ -1050,7 +1057,7 @@
           <a:p>
             <a:pPr lvl="0"/>
             <a:r>
-              <a:rPr lang="en-US" smtClean="0"/>
+              <a:rPr lang="en-US"/>
               <a:t>Click to edit Master text styles</a:t>
             </a:r>
           </a:p>
@@ -1074,7 +1081,7 @@
             <a:fld id="{1D8BD707-D9CF-40AE-B4C6-C98DA3205C09}" type="datetimeFigureOut">
               <a:rPr lang="en-US" smtClean="0"/>
               <a:pPr/>
-              <a:t>8/1/2011</a:t>
+              <a:t>5/27/2025</a:t>
             </a:fld>
             <a:endParaRPr lang="en-US"/>
           </a:p>
@@ -1164,10 +1171,9 @@
           <a:lstStyle/>
           <a:p>
             <a:r>
-              <a:rPr lang="en-US" smtClean="0"/>
+              <a:rPr lang="en-US"/>
               <a:t>Click to edit Master title style</a:t>
             </a:r>
-            <a:endParaRPr lang="en-US"/>
           </a:p>
         </p:txBody>
       </p:sp>
@@ -1221,38 +1227,37 @@
           <a:p>
             <a:pPr lvl="0"/>
             <a:r>
-              <a:rPr lang="en-US" smtClean="0"/>
+              <a:rPr lang="en-US"/>
               <a:t>Click to edit Master text styles</a:t>
             </a:r>
           </a:p>
           <a:p>
             <a:pPr lvl="1"/>
             <a:r>
-              <a:rPr lang="en-US" smtClean="0"/>
+              <a:rPr lang="en-US"/>
               <a:t>Second level</a:t>
             </a:r>
           </a:p>
           <a:p>
             <a:pPr lvl="2"/>
             <a:r>
-              <a:rPr lang="en-US" smtClean="0"/>
+              <a:rPr lang="en-US"/>
               <a:t>Third level</a:t>
             </a:r>
           </a:p>
           <a:p>
             <a:pPr lvl="3"/>
             <a:r>
-              <a:rPr lang="en-US" smtClean="0"/>
+              <a:rPr lang="en-US"/>
               <a:t>Fourth level</a:t>
             </a:r>
           </a:p>
           <a:p>
             <a:pPr lvl="4"/>
             <a:r>
-              <a:rPr lang="en-US" smtClean="0"/>
+              <a:rPr lang="en-US"/>
               <a:t>Fifth level</a:t>
             </a:r>
-            <a:endParaRPr lang="en-US"/>
           </a:p>
         </p:txBody>
       </p:sp>
@@ -1306,38 +1311,37 @@
           <a:p>
             <a:pPr lvl="0"/>
             <a:r>
-              <a:rPr lang="en-US" smtClean="0"/>
+              <a:rPr lang="en-US"/>
               <a:t>Click to edit Master text styles</a:t>
             </a:r>
           </a:p>
           <a:p>
             <a:pPr lvl="1"/>
             <a:r>
-              <a:rPr lang="en-US" smtClean="0"/>
+              <a:rPr lang="en-US"/>
               <a:t>Second level</a:t>
             </a:r>
           </a:p>
           <a:p>
             <a:pPr lvl="2"/>
             <a:r>
-              <a:rPr lang="en-US" smtClean="0"/>
+              <a:rPr lang="en-US"/>
               <a:t>Third level</a:t>
             </a:r>
           </a:p>
           <a:p>
             <a:pPr lvl="3"/>
             <a:r>
-              <a:rPr lang="en-US" smtClean="0"/>
+              <a:rPr lang="en-US"/>
               <a:t>Fourth level</a:t>
             </a:r>
           </a:p>
           <a:p>
             <a:pPr lvl="4"/>
             <a:r>
-              <a:rPr lang="en-US" smtClean="0"/>
+              <a:rPr lang="en-US"/>
               <a:t>Fifth level</a:t>
             </a:r>
-            <a:endParaRPr lang="en-US"/>
           </a:p>
         </p:txBody>
       </p:sp>
@@ -1359,7 +1363,7 @@
             <a:fld id="{1D8BD707-D9CF-40AE-B4C6-C98DA3205C09}" type="datetimeFigureOut">
               <a:rPr lang="en-US" smtClean="0"/>
               <a:pPr/>
-              <a:t>8/1/2011</a:t>
+              <a:t>5/27/2025</a:t>
             </a:fld>
             <a:endParaRPr lang="en-US"/>
           </a:p>
@@ -1453,10 +1457,9 @@
           </a:lstStyle>
           <a:p>
             <a:r>
-              <a:rPr lang="en-US" smtClean="0"/>
+              <a:rPr lang="en-US"/>
               <a:t>Click to edit Master title style</a:t>
             </a:r>
-            <a:endParaRPr lang="en-US"/>
           </a:p>
         </p:txBody>
       </p:sp>
@@ -1519,7 +1522,7 @@
           <a:p>
             <a:pPr lvl="0"/>
             <a:r>
-              <a:rPr lang="en-US" smtClean="0"/>
+              <a:rPr lang="en-US"/>
               <a:t>Click to edit Master text styles</a:t>
             </a:r>
           </a:p>
@@ -1575,38 +1578,37 @@
           <a:p>
             <a:pPr lvl="0"/>
             <a:r>
-              <a:rPr lang="en-US" smtClean="0"/>
+              <a:rPr lang="en-US"/>
               <a:t>Click to edit Master text styles</a:t>
             </a:r>
           </a:p>
           <a:p>
             <a:pPr lvl="1"/>
             <a:r>
-              <a:rPr lang="en-US" smtClean="0"/>
+              <a:rPr lang="en-US"/>
               <a:t>Second level</a:t>
             </a:r>
           </a:p>
           <a:p>
             <a:pPr lvl="2"/>
             <a:r>
-              <a:rPr lang="en-US" smtClean="0"/>
+              <a:rPr lang="en-US"/>
               <a:t>Third level</a:t>
             </a:r>
           </a:p>
           <a:p>
             <a:pPr lvl="3"/>
             <a:r>
-              <a:rPr lang="en-US" smtClean="0"/>
+              <a:rPr lang="en-US"/>
               <a:t>Fourth level</a:t>
             </a:r>
           </a:p>
           <a:p>
             <a:pPr lvl="4"/>
             <a:r>
-              <a:rPr lang="en-US" smtClean="0"/>
+              <a:rPr lang="en-US"/>
               <a:t>Fifth level</a:t>
             </a:r>
-            <a:endParaRPr lang="en-US"/>
           </a:p>
         </p:txBody>
       </p:sp>
@@ -1669,7 +1671,7 @@
           <a:p>
             <a:pPr lvl="0"/>
             <a:r>
-              <a:rPr lang="en-US" smtClean="0"/>
+              <a:rPr lang="en-US"/>
               <a:t>Click to edit Master text styles</a:t>
             </a:r>
           </a:p>
@@ -1725,38 +1727,37 @@
           <a:p>
             <a:pPr lvl="0"/>
             <a:r>
-              <a:rPr lang="en-US" smtClean="0"/>
+              <a:rPr lang="en-US"/>
               <a:t>Click to edit Master text styles</a:t>
             </a:r>
           </a:p>
           <a:p>
             <a:pPr lvl="1"/>
             <a:r>
-              <a:rPr lang="en-US" smtClean="0"/>
+              <a:rPr lang="en-US"/>
               <a:t>Second level</a:t>
             </a:r>
           </a:p>
           <a:p>
             <a:pPr lvl="2"/>
             <a:r>
-              <a:rPr lang="en-US" smtClean="0"/>
+              <a:rPr lang="en-US"/>
               <a:t>Third level</a:t>
             </a:r>
           </a:p>
           <a:p>
             <a:pPr lvl="3"/>
             <a:r>
-              <a:rPr lang="en-US" smtClean="0"/>
+              <a:rPr lang="en-US"/>
               <a:t>Fourth level</a:t>
             </a:r>
           </a:p>
           <a:p>
             <a:pPr lvl="4"/>
             <a:r>
-              <a:rPr lang="en-US" smtClean="0"/>
+              <a:rPr lang="en-US"/>
               <a:t>Fifth level</a:t>
             </a:r>
-            <a:endParaRPr lang="en-US"/>
           </a:p>
         </p:txBody>
       </p:sp>
@@ -1778,7 +1779,7 @@
             <a:fld id="{1D8BD707-D9CF-40AE-B4C6-C98DA3205C09}" type="datetimeFigureOut">
               <a:rPr lang="en-US" smtClean="0"/>
               <a:pPr/>
-              <a:t>8/1/2011</a:t>
+              <a:t>5/27/2025</a:t>
             </a:fld>
             <a:endParaRPr lang="en-US"/>
           </a:p>
@@ -1868,10 +1869,9 @@
           <a:lstStyle/>
           <a:p>
             <a:r>
-              <a:rPr lang="en-US" smtClean="0"/>
+              <a:rPr lang="en-US"/>
               <a:t>Click to edit Master title style</a:t>
             </a:r>
-            <a:endParaRPr lang="en-US"/>
           </a:p>
         </p:txBody>
       </p:sp>
@@ -1893,7 +1893,7 @@
             <a:fld id="{1D8BD707-D9CF-40AE-B4C6-C98DA3205C09}" type="datetimeFigureOut">
               <a:rPr lang="en-US" smtClean="0"/>
               <a:pPr/>
-              <a:t>8/1/2011</a:t>
+              <a:t>5/27/2025</a:t>
             </a:fld>
             <a:endParaRPr lang="en-US"/>
           </a:p>
@@ -1985,7 +1985,7 @@
             <a:fld id="{1D8BD707-D9CF-40AE-B4C6-C98DA3205C09}" type="datetimeFigureOut">
               <a:rPr lang="en-US" smtClean="0"/>
               <a:pPr/>
-              <a:t>8/1/2011</a:t>
+              <a:t>5/27/2025</a:t>
             </a:fld>
             <a:endParaRPr lang="en-US"/>
           </a:p>
@@ -2084,10 +2084,9 @@
           </a:lstStyle>
           <a:p>
             <a:r>
-              <a:rPr lang="en-US" smtClean="0"/>
+              <a:rPr lang="en-US"/>
               <a:t>Click to edit Master title style</a:t>
             </a:r>
-            <a:endParaRPr lang="en-US"/>
           </a:p>
         </p:txBody>
       </p:sp>
@@ -2141,38 +2140,37 @@
           <a:p>
             <a:pPr lvl="0"/>
             <a:r>
-              <a:rPr lang="en-US" smtClean="0"/>
+              <a:rPr lang="en-US"/>
               <a:t>Click to edit Master text styles</a:t>
             </a:r>
           </a:p>
           <a:p>
             <a:pPr lvl="1"/>
             <a:r>
-              <a:rPr lang="en-US" smtClean="0"/>
+              <a:rPr lang="en-US"/>
               <a:t>Second level</a:t>
             </a:r>
           </a:p>
           <a:p>
             <a:pPr lvl="2"/>
             <a:r>
-              <a:rPr lang="en-US" smtClean="0"/>
+              <a:rPr lang="en-US"/>
               <a:t>Third level</a:t>
             </a:r>
           </a:p>
           <a:p>
             <a:pPr lvl="3"/>
             <a:r>
-              <a:rPr lang="en-US" smtClean="0"/>
+              <a:rPr lang="en-US"/>
               <a:t>Fourth level</a:t>
             </a:r>
           </a:p>
           <a:p>
             <a:pPr lvl="4"/>
             <a:r>
-              <a:rPr lang="en-US" smtClean="0"/>
+              <a:rPr lang="en-US"/>
               <a:t>Fifth level</a:t>
             </a:r>
-            <a:endParaRPr lang="en-US"/>
           </a:p>
         </p:txBody>
       </p:sp>
@@ -2235,7 +2233,7 @@
           <a:p>
             <a:pPr lvl="0"/>
             <a:r>
-              <a:rPr lang="en-US" smtClean="0"/>
+              <a:rPr lang="en-US"/>
               <a:t>Click to edit Master text styles</a:t>
             </a:r>
           </a:p>
@@ -2259,7 +2257,7 @@
             <a:fld id="{1D8BD707-D9CF-40AE-B4C6-C98DA3205C09}" type="datetimeFigureOut">
               <a:rPr lang="en-US" smtClean="0"/>
               <a:pPr/>
-              <a:t>8/1/2011</a:t>
+              <a:t>5/27/2025</a:t>
             </a:fld>
             <a:endParaRPr lang="en-US"/>
           </a:p>
@@ -2358,10 +2356,9 @@
           </a:lstStyle>
           <a:p>
             <a:r>
-              <a:rPr lang="en-US" smtClean="0"/>
+              <a:rPr lang="en-US"/>
               <a:t>Click to edit Master title style</a:t>
             </a:r>
-            <a:endParaRPr lang="en-US"/>
           </a:p>
         </p:txBody>
       </p:sp>
@@ -2485,7 +2482,7 @@
           <a:p>
             <a:pPr lvl="0"/>
             <a:r>
-              <a:rPr lang="en-US" smtClean="0"/>
+              <a:rPr lang="en-US"/>
               <a:t>Click to edit Master text styles</a:t>
             </a:r>
           </a:p>
@@ -2509,7 +2506,7 @@
             <a:fld id="{1D8BD707-D9CF-40AE-B4C6-C98DA3205C09}" type="datetimeFigureOut">
               <a:rPr lang="en-US" smtClean="0"/>
               <a:pPr/>
-              <a:t>8/1/2011</a:t>
+              <a:t>5/27/2025</a:t>
             </a:fld>
             <a:endParaRPr lang="en-US"/>
           </a:p>
@@ -2614,10 +2611,9 @@
           <a:lstStyle/>
           <a:p>
             <a:r>
-              <a:rPr lang="en-US" smtClean="0"/>
+              <a:rPr lang="en-US"/>
               <a:t>Click to edit Master title style</a:t>
             </a:r>
-            <a:endParaRPr lang="en-US"/>
           </a:p>
         </p:txBody>
       </p:sp>
@@ -2648,38 +2644,37 @@
           <a:p>
             <a:pPr lvl="0"/>
             <a:r>
-              <a:rPr lang="en-US" smtClean="0"/>
+              <a:rPr lang="en-US"/>
               <a:t>Click to edit Master text styles</a:t>
             </a:r>
           </a:p>
           <a:p>
             <a:pPr lvl="1"/>
             <a:r>
-              <a:rPr lang="en-US" smtClean="0"/>
+              <a:rPr lang="en-US"/>
               <a:t>Second level</a:t>
             </a:r>
           </a:p>
           <a:p>
             <a:pPr lvl="2"/>
             <a:r>
-              <a:rPr lang="en-US" smtClean="0"/>
+              <a:rPr lang="en-US"/>
               <a:t>Third level</a:t>
             </a:r>
           </a:p>
           <a:p>
             <a:pPr lvl="3"/>
             <a:r>
-              <a:rPr lang="en-US" smtClean="0"/>
+              <a:rPr lang="en-US"/>
               <a:t>Fourth level</a:t>
             </a:r>
           </a:p>
           <a:p>
             <a:pPr lvl="4"/>
             <a:r>
-              <a:rPr lang="en-US" smtClean="0"/>
+              <a:rPr lang="en-US"/>
               <a:t>Fifth level</a:t>
             </a:r>
-            <a:endParaRPr lang="en-US"/>
           </a:p>
         </p:txBody>
       </p:sp>
@@ -2719,7 +2714,7 @@
             <a:fld id="{1D8BD707-D9CF-40AE-B4C6-C98DA3205C09}" type="datetimeFigureOut">
               <a:rPr lang="en-US" smtClean="0"/>
               <a:pPr/>
-              <a:t>8/1/2011</a:t>
+              <a:t>5/27/2025</a:t>
             </a:fld>
             <a:endParaRPr lang="en-US"/>
           </a:p>
@@ -3074,13 +3069,14 @@
 </file>
 
 <file path=ppt/slides/slide1.xml><?xml version="1.0" encoding="utf-8"?>
-<p:sld xmlns:p="http://schemas.openxmlformats.org/presentationml/2006/main" xmlns:a="http://schemas.openxmlformats.org/drawingml/2006/main" xmlns:r="http://schemas.openxmlformats.org/officeDocument/2006/relationships">
+<p:sld xmlns:a="http://schemas.openxmlformats.org/drawingml/2006/main" xmlns:r="http://schemas.openxmlformats.org/officeDocument/2006/relationships" xmlns:p="http://schemas.openxmlformats.org/presentationml/2006/main">
   <p:cSld>
     <p:bg>
       <p:bgPr>
         <a:solidFill>
           <a:srgbClr val="121723"/>
         </a:solidFill>
+        <a:effectLst/>
       </p:bgPr>
     </p:bg>
     <p:spTree>
@@ -3099,12 +3095,12 @@
       </p:grpSpPr>
       <p:sp>
         <p:nvSpPr>
-          <p:cNvPr name="Freeform 2" id="2"/>
+          <p:cNvPr id="2" name="Freeform 2"/>
           <p:cNvSpPr/>
           <p:nvPr/>
         </p:nvSpPr>
         <p:spPr>
-          <a:xfrm flipH="false" flipV="false" rot="0">
+          <a:xfrm>
             <a:off x="1063990" y="1028700"/>
             <a:ext cx="1276643" cy="968653"/>
           </a:xfrm>
@@ -3113,9 +3109,9 @@
             <a:gdLst/>
             <a:ahLst/>
             <a:cxnLst/>
-            <a:rect r="r" b="b" t="t" l="l"/>
+            <a:rect l="l" t="t" r="r" b="b"/>
             <a:pathLst>
-              <a:path h="968653" w="1276643">
+              <a:path w="1276643" h="968653">
                 <a:moveTo>
                   <a:pt x="0" y="0"/>
                 </a:moveTo>
@@ -3144,19 +3140,26 @@
               </a:extLst>
             </a:blip>
             <a:stretch>
-              <a:fillRect l="0" t="0" r="0" b="0"/>
+              <a:fillRect/>
             </a:stretch>
           </a:blipFill>
         </p:spPr>
-      </p:sp>
-      <p:sp>
-        <p:nvSpPr>
-          <p:cNvPr name="Freeform 3" id="3"/>
+        <p:txBody>
+          <a:bodyPr/>
+          <a:lstStyle/>
+          <a:p>
+            <a:endParaRPr lang="ro-MD"/>
+          </a:p>
+        </p:txBody>
+      </p:sp>
+      <p:sp>
+        <p:nvSpPr>
+          <p:cNvPr id="3" name="Freeform 3"/>
           <p:cNvSpPr/>
           <p:nvPr/>
         </p:nvSpPr>
         <p:spPr>
-          <a:xfrm flipH="false" flipV="false" rot="-5400000">
+          <a:xfrm rot="-5400000">
             <a:off x="10775733" y="-327325"/>
             <a:ext cx="11765215" cy="10941650"/>
           </a:xfrm>
@@ -3165,9 +3168,9 @@
             <a:gdLst/>
             <a:ahLst/>
             <a:cxnLst/>
-            <a:rect r="r" b="b" t="t" l="l"/>
+            <a:rect l="l" t="t" r="r" b="b"/>
             <a:pathLst>
-              <a:path h="10941650" w="11765215">
+              <a:path w="11765215" h="10941650">
                 <a:moveTo>
                   <a:pt x="0" y="0"/>
                 </a:moveTo>
@@ -3196,19 +3199,26 @@
               </a:extLst>
             </a:blip>
             <a:stretch>
-              <a:fillRect l="0" t="0" r="0" b="0"/>
+              <a:fillRect/>
             </a:stretch>
           </a:blipFill>
         </p:spPr>
-      </p:sp>
-      <p:sp>
-        <p:nvSpPr>
-          <p:cNvPr name="TextBox 4" id="4"/>
-          <p:cNvSpPr txBox="true"/>
+        <p:txBody>
+          <a:bodyPr/>
+          <a:lstStyle/>
+          <a:p>
+            <a:endParaRPr lang="ro-MD"/>
+          </a:p>
+        </p:txBody>
+      </p:sp>
+      <p:sp>
+        <p:nvSpPr>
+          <p:cNvPr id="4" name="TextBox 4"/>
+          <p:cNvSpPr txBox="1"/>
           <p:nvPr/>
         </p:nvSpPr>
         <p:spPr>
-          <a:xfrm rot="0">
+          <a:xfrm>
             <a:off x="1028700" y="8811275"/>
             <a:ext cx="2856799" cy="895127"/>
           </a:xfrm>
@@ -3217,7 +3227,7 @@
           </a:prstGeom>
         </p:spPr>
         <p:txBody>
-          <a:bodyPr anchor="t" rtlCol="false" tIns="0" lIns="0" bIns="0" rIns="0">
+          <a:bodyPr lIns="0" tIns="0" rIns="0" bIns="0" rtlCol="0" anchor="t">
             <a:spAutoFit/>
           </a:bodyPr>
           <a:lstStyle/>
@@ -3228,7 +3238,7 @@
               </a:lnSpc>
             </a:pPr>
             <a:r>
-              <a:rPr lang="en-US" sz="3123" b="true">
+              <a:rPr lang="en-US" sz="3123" b="1">
                 <a:solidFill>
                   <a:srgbClr val="E7FF2F"/>
                 </a:solidFill>
@@ -3244,12 +3254,12 @@
       </p:sp>
       <p:sp>
         <p:nvSpPr>
-          <p:cNvPr name="TextBox 5" id="5"/>
-          <p:cNvSpPr txBox="true"/>
+          <p:cNvPr id="5" name="TextBox 5"/>
+          <p:cNvSpPr txBox="1"/>
           <p:nvPr/>
         </p:nvSpPr>
         <p:spPr>
-          <a:xfrm rot="0">
+          <a:xfrm>
             <a:off x="5445927" y="8811275"/>
             <a:ext cx="2557480" cy="449142"/>
           </a:xfrm>
@@ -3258,7 +3268,7 @@
           </a:prstGeom>
         </p:spPr>
         <p:txBody>
-          <a:bodyPr anchor="t" rtlCol="false" tIns="0" lIns="0" bIns="0" rIns="0">
+          <a:bodyPr lIns="0" tIns="0" rIns="0" bIns="0" rtlCol="0" anchor="t">
             <a:spAutoFit/>
           </a:bodyPr>
           <a:lstStyle/>
@@ -3269,7 +3279,7 @@
               </a:lnSpc>
             </a:pPr>
             <a:r>
-              <a:rPr lang="en-US" sz="3123" b="true">
+              <a:rPr lang="en-US" sz="3123" b="1">
                 <a:solidFill>
                   <a:srgbClr val="E7FF2F"/>
                 </a:solidFill>
@@ -3285,12 +3295,12 @@
       </p:sp>
       <p:sp>
         <p:nvSpPr>
-          <p:cNvPr name="TextBox 6" id="6"/>
-          <p:cNvSpPr txBox="true"/>
+          <p:cNvPr id="6" name="TextBox 6"/>
+          <p:cNvSpPr txBox="1"/>
           <p:nvPr/>
         </p:nvSpPr>
         <p:spPr>
-          <a:xfrm rot="0">
+          <a:xfrm>
             <a:off x="1028700" y="8315835"/>
             <a:ext cx="2856799" cy="333489"/>
           </a:xfrm>
@@ -3299,7 +3309,7 @@
           </a:prstGeom>
         </p:spPr>
         <p:txBody>
-          <a:bodyPr anchor="t" rtlCol="false" tIns="0" lIns="0" bIns="0" rIns="0">
+          <a:bodyPr lIns="0" tIns="0" rIns="0" bIns="0" rtlCol="0" anchor="t">
             <a:spAutoFit/>
           </a:bodyPr>
           <a:lstStyle/>
@@ -3326,12 +3336,12 @@
       </p:sp>
       <p:sp>
         <p:nvSpPr>
-          <p:cNvPr name="TextBox 7" id="7"/>
-          <p:cNvSpPr txBox="true"/>
+          <p:cNvPr id="7" name="TextBox 7"/>
+          <p:cNvSpPr txBox="1"/>
           <p:nvPr/>
         </p:nvSpPr>
         <p:spPr>
-          <a:xfrm rot="0">
+          <a:xfrm>
             <a:off x="5445927" y="8315835"/>
             <a:ext cx="1779601" cy="333489"/>
           </a:xfrm>
@@ -3340,7 +3350,7 @@
           </a:prstGeom>
         </p:spPr>
         <p:txBody>
-          <a:bodyPr anchor="t" rtlCol="false" tIns="0" lIns="0" bIns="0" rIns="0">
+          <a:bodyPr lIns="0" tIns="0" rIns="0" bIns="0" rtlCol="0" anchor="t">
             <a:spAutoFit/>
           </a:bodyPr>
           <a:lstStyle/>
@@ -3367,12 +3377,12 @@
       </p:sp>
       <p:sp>
         <p:nvSpPr>
-          <p:cNvPr name="TextBox 8" id="8"/>
-          <p:cNvSpPr txBox="true"/>
+          <p:cNvPr id="8" name="TextBox 8"/>
+          <p:cNvSpPr txBox="1"/>
           <p:nvPr/>
         </p:nvSpPr>
         <p:spPr>
-          <a:xfrm rot="0">
+          <a:xfrm>
             <a:off x="1028700" y="3805666"/>
             <a:ext cx="9626802" cy="3130621"/>
           </a:xfrm>
@@ -3381,7 +3391,7 @@
           </a:prstGeom>
         </p:spPr>
         <p:txBody>
-          <a:bodyPr anchor="t" rtlCol="false" tIns="0" lIns="0" bIns="0" rIns="0">
+          <a:bodyPr lIns="0" tIns="0" rIns="0" bIns="0" rtlCol="0" anchor="t">
             <a:spAutoFit/>
           </a:bodyPr>
           <a:lstStyle/>
@@ -3434,13 +3444,14 @@
 </file>
 
 <file path=ppt/slides/slide10.xml><?xml version="1.0" encoding="utf-8"?>
-<p:sld xmlns:p="http://schemas.openxmlformats.org/presentationml/2006/main" xmlns:a="http://schemas.openxmlformats.org/drawingml/2006/main" xmlns:r="http://schemas.openxmlformats.org/officeDocument/2006/relationships">
+<p:sld xmlns:a="http://schemas.openxmlformats.org/drawingml/2006/main" xmlns:r="http://schemas.openxmlformats.org/officeDocument/2006/relationships" xmlns:p="http://schemas.openxmlformats.org/presentationml/2006/main">
   <p:cSld>
     <p:bg>
       <p:bgPr>
         <a:solidFill>
           <a:srgbClr val="121723"/>
         </a:solidFill>
+        <a:effectLst/>
       </p:bgPr>
     </p:bg>
     <p:spTree>
@@ -3459,12 +3470,12 @@
       </p:grpSpPr>
       <p:sp>
         <p:nvSpPr>
-          <p:cNvPr name="Freeform 2" id="2"/>
+          <p:cNvPr id="2" name="Freeform 2"/>
           <p:cNvSpPr/>
           <p:nvPr/>
         </p:nvSpPr>
         <p:spPr>
-          <a:xfrm flipH="true" flipV="false" rot="0">
+          <a:xfrm flipH="1">
             <a:off x="9370565" y="-1501280"/>
             <a:ext cx="7030467" cy="4587380"/>
           </a:xfrm>
@@ -3473,9 +3484,9 @@
             <a:gdLst/>
             <a:ahLst/>
             <a:cxnLst/>
-            <a:rect r="r" b="b" t="t" l="l"/>
+            <a:rect l="l" t="t" r="r" b="b"/>
             <a:pathLst>
-              <a:path h="4587380" w="7030467">
+              <a:path w="7030467" h="4587380">
                 <a:moveTo>
                   <a:pt x="7030467" y="0"/>
                 </a:moveTo>
@@ -3504,19 +3515,26 @@
               </a:extLst>
             </a:blip>
             <a:stretch>
-              <a:fillRect l="0" t="0" r="0" b="0"/>
+              <a:fillRect/>
             </a:stretch>
           </a:blipFill>
         </p:spPr>
-      </p:sp>
-      <p:sp>
-        <p:nvSpPr>
-          <p:cNvPr name="Freeform 3" id="3"/>
+        <p:txBody>
+          <a:bodyPr/>
+          <a:lstStyle/>
+          <a:p>
+            <a:endParaRPr lang="ro-MD"/>
+          </a:p>
+        </p:txBody>
+      </p:sp>
+      <p:sp>
+        <p:nvSpPr>
+          <p:cNvPr id="3" name="Freeform 3"/>
           <p:cNvSpPr/>
           <p:nvPr/>
         </p:nvSpPr>
         <p:spPr>
-          <a:xfrm flipH="false" flipV="false" rot="0">
+          <a:xfrm>
             <a:off x="1063990" y="1028700"/>
             <a:ext cx="1276643" cy="968653"/>
           </a:xfrm>
@@ -3525,9 +3543,9 @@
             <a:gdLst/>
             <a:ahLst/>
             <a:cxnLst/>
-            <a:rect r="r" b="b" t="t" l="l"/>
+            <a:rect l="l" t="t" r="r" b="b"/>
             <a:pathLst>
-              <a:path h="968653" w="1276643">
+              <a:path w="1276643" h="968653">
                 <a:moveTo>
                   <a:pt x="0" y="0"/>
                 </a:moveTo>
@@ -3556,19 +3574,26 @@
               </a:extLst>
             </a:blip>
             <a:stretch>
-              <a:fillRect l="0" t="0" r="0" b="0"/>
+              <a:fillRect/>
             </a:stretch>
           </a:blipFill>
         </p:spPr>
-      </p:sp>
-      <p:sp>
-        <p:nvSpPr>
-          <p:cNvPr name="TextBox 4" id="4"/>
-          <p:cNvSpPr txBox="true"/>
+        <p:txBody>
+          <a:bodyPr/>
+          <a:lstStyle/>
+          <a:p>
+            <a:endParaRPr lang="ro-MD"/>
+          </a:p>
+        </p:txBody>
+      </p:sp>
+      <p:sp>
+        <p:nvSpPr>
+          <p:cNvPr id="4" name="TextBox 4"/>
+          <p:cNvSpPr txBox="1"/>
           <p:nvPr/>
         </p:nvSpPr>
         <p:spPr>
-          <a:xfrm rot="0">
+          <a:xfrm>
             <a:off x="1028700" y="3028950"/>
             <a:ext cx="8438796" cy="5273028"/>
           </a:xfrm>
@@ -3577,7 +3602,7 @@
           </a:prstGeom>
         </p:spPr>
         <p:txBody>
-          <a:bodyPr anchor="t" rtlCol="false" tIns="0" lIns="0" bIns="0" rIns="0">
+          <a:bodyPr lIns="0" tIns="0" rIns="0" bIns="0" rtlCol="0" anchor="t">
             <a:spAutoFit/>
           </a:bodyPr>
           <a:lstStyle/>
@@ -3645,20 +3670,21 @@
   <p:clrMapOvr>
     <a:masterClrMapping/>
   </p:clrMapOvr>
-  <p:transition spd="fast">
-    <p:wipe dir="l"/>
+  <p:transition>
+    <p:wipe/>
   </p:transition>
 </p:sld>
 </file>
 
 <file path=ppt/slides/slide2.xml><?xml version="1.0" encoding="utf-8"?>
-<p:sld xmlns:p="http://schemas.openxmlformats.org/presentationml/2006/main" xmlns:a="http://schemas.openxmlformats.org/drawingml/2006/main" xmlns:r="http://schemas.openxmlformats.org/officeDocument/2006/relationships">
+<p:sld xmlns:a="http://schemas.openxmlformats.org/drawingml/2006/main" xmlns:r="http://schemas.openxmlformats.org/officeDocument/2006/relationships" xmlns:p="http://schemas.openxmlformats.org/presentationml/2006/main">
   <p:cSld>
     <p:bg>
       <p:bgPr>
         <a:solidFill>
           <a:srgbClr val="121723"/>
         </a:solidFill>
+        <a:effectLst/>
       </p:bgPr>
     </p:bg>
     <p:spTree>
@@ -3677,12 +3703,12 @@
       </p:grpSpPr>
       <p:sp>
         <p:nvSpPr>
-          <p:cNvPr name="Freeform 2" id="2"/>
+          <p:cNvPr id="2" name="Freeform 2"/>
           <p:cNvSpPr/>
           <p:nvPr/>
         </p:nvSpPr>
         <p:spPr>
-          <a:xfrm flipH="false" flipV="false" rot="0">
+          <a:xfrm>
             <a:off x="1063990" y="1028700"/>
             <a:ext cx="1276643" cy="968653"/>
           </a:xfrm>
@@ -3691,9 +3717,9 @@
             <a:gdLst/>
             <a:ahLst/>
             <a:cxnLst/>
-            <a:rect r="r" b="b" t="t" l="l"/>
+            <a:rect l="l" t="t" r="r" b="b"/>
             <a:pathLst>
-              <a:path h="968653" w="1276643">
+              <a:path w="1276643" h="968653">
                 <a:moveTo>
                   <a:pt x="0" y="0"/>
                 </a:moveTo>
@@ -3722,19 +3748,26 @@
               </a:extLst>
             </a:blip>
             <a:stretch>
-              <a:fillRect l="0" t="0" r="0" b="0"/>
+              <a:fillRect/>
             </a:stretch>
           </a:blipFill>
         </p:spPr>
-      </p:sp>
-      <p:sp>
-        <p:nvSpPr>
-          <p:cNvPr name="Freeform 3" id="3"/>
+        <p:txBody>
+          <a:bodyPr/>
+          <a:lstStyle/>
+          <a:p>
+            <a:endParaRPr lang="ro-MD"/>
+          </a:p>
+        </p:txBody>
+      </p:sp>
+      <p:sp>
+        <p:nvSpPr>
+          <p:cNvPr id="3" name="Freeform 3"/>
           <p:cNvSpPr/>
           <p:nvPr/>
         </p:nvSpPr>
         <p:spPr>
-          <a:xfrm flipH="false" flipV="false" rot="0">
+          <a:xfrm>
             <a:off x="14434606" y="-2176128"/>
             <a:ext cx="4971028" cy="5072477"/>
           </a:xfrm>
@@ -3743,9 +3776,9 @@
             <a:gdLst/>
             <a:ahLst/>
             <a:cxnLst/>
-            <a:rect r="r" b="b" t="t" l="l"/>
+            <a:rect l="l" t="t" r="r" b="b"/>
             <a:pathLst>
-              <a:path h="5072477" w="4971028">
+              <a:path w="4971028" h="5072477">
                 <a:moveTo>
                   <a:pt x="0" y="0"/>
                 </a:moveTo>
@@ -3774,19 +3807,26 @@
               </a:extLst>
             </a:blip>
             <a:stretch>
-              <a:fillRect l="0" t="0" r="0" b="0"/>
+              <a:fillRect/>
             </a:stretch>
           </a:blipFill>
         </p:spPr>
-      </p:sp>
-      <p:sp>
-        <p:nvSpPr>
-          <p:cNvPr name="Freeform 4" id="4"/>
+        <p:txBody>
+          <a:bodyPr/>
+          <a:lstStyle/>
+          <a:p>
+            <a:endParaRPr lang="ro-MD"/>
+          </a:p>
+        </p:txBody>
+      </p:sp>
+      <p:sp>
+        <p:nvSpPr>
+          <p:cNvPr id="4" name="Freeform 4"/>
           <p:cNvSpPr/>
           <p:nvPr/>
         </p:nvSpPr>
         <p:spPr>
-          <a:xfrm flipH="false" flipV="false" rot="0">
+          <a:xfrm>
             <a:off x="14773786" y="8197282"/>
             <a:ext cx="4971028" cy="1352363"/>
           </a:xfrm>
@@ -3795,9 +3835,9 @@
             <a:gdLst/>
             <a:ahLst/>
             <a:cxnLst/>
-            <a:rect r="r" b="b" t="t" l="l"/>
+            <a:rect l="l" t="t" r="r" b="b"/>
             <a:pathLst>
-              <a:path h="1352363" w="4971028">
+              <a:path w="4971028" h="1352363">
                 <a:moveTo>
                   <a:pt x="0" y="0"/>
                 </a:moveTo>
@@ -3826,19 +3866,26 @@
               </a:extLst>
             </a:blip>
             <a:stretch>
-              <a:fillRect l="0" t="-275082" r="0" b="0"/>
+              <a:fillRect t="-275082"/>
             </a:stretch>
           </a:blipFill>
         </p:spPr>
+        <p:txBody>
+          <a:bodyPr/>
+          <a:lstStyle/>
+          <a:p>
+            <a:endParaRPr lang="ro-MD"/>
+          </a:p>
+        </p:txBody>
       </p:sp>
       <p:grpSp>
         <p:nvGrpSpPr>
-          <p:cNvPr name="Group 5" id="5"/>
+          <p:cNvPr id="5" name="Group 5"/>
           <p:cNvGrpSpPr/>
           <p:nvPr/>
         </p:nvGrpSpPr>
         <p:grpSpPr>
-          <a:xfrm rot="0">
+          <a:xfrm>
             <a:off x="10237132" y="1235669"/>
             <a:ext cx="7904789" cy="8499645"/>
             <a:chOff x="0" y="0"/>
@@ -3847,12 +3894,12 @@
         </p:grpSpPr>
         <p:sp>
           <p:nvSpPr>
-            <p:cNvPr name="Freeform 6" id="6"/>
+            <p:cNvPr id="6" name="Freeform 6"/>
             <p:cNvSpPr/>
             <p:nvPr/>
           </p:nvSpPr>
           <p:spPr>
-            <a:xfrm flipH="false" flipV="false" rot="0">
+            <a:xfrm>
               <a:off x="0" y="0"/>
               <a:ext cx="2137586" cy="2298445"/>
             </a:xfrm>
@@ -3861,9 +3908,9 @@
               <a:gdLst/>
               <a:ahLst/>
               <a:cxnLst/>
-              <a:rect r="r" b="b" t="t" l="l"/>
+              <a:rect l="l" t="t" r="r" b="b"/>
               <a:pathLst>
-                <a:path h="2298445" w="2137586">
+                <a:path w="2137586" h="2298445">
                   <a:moveTo>
                     <a:pt x="49949" y="0"/>
                   </a:moveTo>
@@ -3907,11 +3954,18 @@
               <a:srgbClr val="FFFFFF"/>
             </a:solidFill>
           </p:spPr>
+          <p:txBody>
+            <a:bodyPr/>
+            <a:lstStyle/>
+            <a:p>
+              <a:endParaRPr lang="ro-MD"/>
+            </a:p>
+          </p:txBody>
         </p:sp>
         <p:sp>
           <p:nvSpPr>
-            <p:cNvPr name="TextBox 7" id="7"/>
-            <p:cNvSpPr txBox="true"/>
+            <p:cNvPr id="7" name="TextBox 7"/>
+            <p:cNvSpPr txBox="1"/>
             <p:nvPr/>
           </p:nvSpPr>
           <p:spPr>
@@ -3924,7 +3978,7 @@
             </a:prstGeom>
           </p:spPr>
           <p:txBody>
-            <a:bodyPr anchor="ctr" rtlCol="false" tIns="50800" lIns="50800" bIns="50800" rIns="50800"/>
+            <a:bodyPr lIns="50800" tIns="50800" rIns="50800" bIns="50800" rtlCol="0" anchor="ctr"/>
             <a:lstStyle/>
             <a:p>
               <a:pPr algn="ctr">
@@ -3932,18 +3986,19 @@
                   <a:spcPts val="2598"/>
                 </a:lnSpc>
               </a:pPr>
+              <a:endParaRPr/>
             </a:p>
           </p:txBody>
         </p:sp>
       </p:grpSp>
       <p:sp>
         <p:nvSpPr>
-          <p:cNvPr name="Freeform 8" id="8"/>
+          <p:cNvPr id="8" name="Freeform 8"/>
           <p:cNvSpPr/>
           <p:nvPr/>
         </p:nvSpPr>
         <p:spPr>
-          <a:xfrm flipH="false" flipV="false" rot="0">
+          <a:xfrm>
             <a:off x="8808225" y="4044878"/>
             <a:ext cx="5965561" cy="2171366"/>
           </a:xfrm>
@@ -3952,9 +4007,9 @@
             <a:gdLst/>
             <a:ahLst/>
             <a:cxnLst/>
-            <a:rect r="r" b="b" t="t" l="l"/>
+            <a:rect l="l" t="t" r="r" b="b"/>
             <a:pathLst>
-              <a:path h="2171366" w="5965561">
+              <a:path w="5965561" h="2171366">
                 <a:moveTo>
                   <a:pt x="0" y="0"/>
                 </a:moveTo>
@@ -3983,19 +4038,26 @@
               </a:extLst>
             </a:blip>
             <a:stretch>
-              <a:fillRect l="0" t="0" r="0" b="-220861"/>
+              <a:fillRect b="-220861"/>
             </a:stretch>
           </a:blipFill>
         </p:spPr>
-      </p:sp>
-      <p:sp>
-        <p:nvSpPr>
-          <p:cNvPr name="TextBox 9" id="9"/>
-          <p:cNvSpPr txBox="true"/>
+        <p:txBody>
+          <a:bodyPr/>
+          <a:lstStyle/>
+          <a:p>
+            <a:endParaRPr lang="ro-MD"/>
+          </a:p>
+        </p:txBody>
+      </p:sp>
+      <p:sp>
+        <p:nvSpPr>
+          <p:cNvPr id="9" name="TextBox 9"/>
+          <p:cNvSpPr txBox="1"/>
           <p:nvPr/>
         </p:nvSpPr>
         <p:spPr>
-          <a:xfrm rot="0">
+          <a:xfrm>
             <a:off x="1028700" y="2744811"/>
             <a:ext cx="7083138" cy="1372870"/>
           </a:xfrm>
@@ -4004,7 +4066,7 @@
           </a:prstGeom>
         </p:spPr>
         <p:txBody>
-          <a:bodyPr anchor="t" rtlCol="false" tIns="0" lIns="0" bIns="0" rIns="0">
+          <a:bodyPr lIns="0" tIns="0" rIns="0" bIns="0" rtlCol="0" anchor="t">
             <a:spAutoFit/>
           </a:bodyPr>
           <a:lstStyle/>
@@ -4031,12 +4093,12 @@
       </p:sp>
       <p:sp>
         <p:nvSpPr>
-          <p:cNvPr name="TextBox 10" id="10"/>
-          <p:cNvSpPr txBox="true"/>
+          <p:cNvPr id="10" name="TextBox 10"/>
+          <p:cNvSpPr txBox="1"/>
           <p:nvPr/>
         </p:nvSpPr>
         <p:spPr>
-          <a:xfrm rot="0">
+          <a:xfrm>
             <a:off x="1028700" y="4681418"/>
             <a:ext cx="1893496" cy="449142"/>
           </a:xfrm>
@@ -4045,7 +4107,7 @@
           </a:prstGeom>
         </p:spPr>
         <p:txBody>
-          <a:bodyPr anchor="t" rtlCol="false" tIns="0" lIns="0" bIns="0" rIns="0">
+          <a:bodyPr lIns="0" tIns="0" rIns="0" bIns="0" rtlCol="0" anchor="t">
             <a:spAutoFit/>
           </a:bodyPr>
           <a:lstStyle/>
@@ -4056,7 +4118,7 @@
               </a:lnSpc>
             </a:pPr>
             <a:r>
-              <a:rPr lang="en-US" sz="3123" b="true">
+              <a:rPr lang="en-US" sz="3123" b="1">
                 <a:solidFill>
                   <a:srgbClr val="E7FF2F"/>
                 </a:solidFill>
@@ -4072,12 +4134,12 @@
       </p:sp>
       <p:sp>
         <p:nvSpPr>
-          <p:cNvPr name="TextBox 11" id="11"/>
-          <p:cNvSpPr txBox="true"/>
+          <p:cNvPr id="11" name="TextBox 11"/>
+          <p:cNvSpPr txBox="1"/>
           <p:nvPr/>
         </p:nvSpPr>
         <p:spPr>
-          <a:xfrm rot="0">
+          <a:xfrm>
             <a:off x="9048650" y="4937878"/>
             <a:ext cx="645849" cy="404414"/>
           </a:xfrm>
@@ -4086,7 +4148,7 @@
           </a:prstGeom>
         </p:spPr>
         <p:txBody>
-          <a:bodyPr anchor="t" rtlCol="false" tIns="0" lIns="0" bIns="0" rIns="0">
+          <a:bodyPr lIns="0" tIns="0" rIns="0" bIns="0" rtlCol="0" anchor="t">
             <a:spAutoFit/>
           </a:bodyPr>
           <a:lstStyle/>
@@ -4097,7 +4159,7 @@
               </a:lnSpc>
             </a:pPr>
             <a:r>
-              <a:rPr lang="en-US" sz="2814" b="true">
+              <a:rPr lang="en-US" sz="2814" b="1">
                 <a:solidFill>
                   <a:srgbClr val="000000"/>
                 </a:solidFill>
@@ -4113,12 +4175,12 @@
       </p:sp>
       <p:sp>
         <p:nvSpPr>
-          <p:cNvPr name="TextBox 12" id="12"/>
-          <p:cNvSpPr txBox="true"/>
+          <p:cNvPr id="12" name="TextBox 12"/>
+          <p:cNvSpPr txBox="1"/>
           <p:nvPr/>
         </p:nvSpPr>
         <p:spPr>
-          <a:xfrm rot="0">
+          <a:xfrm>
             <a:off x="9478613" y="6990382"/>
             <a:ext cx="645849" cy="404414"/>
           </a:xfrm>
@@ -4127,7 +4189,7 @@
           </a:prstGeom>
         </p:spPr>
         <p:txBody>
-          <a:bodyPr anchor="t" rtlCol="false" tIns="0" lIns="0" bIns="0" rIns="0">
+          <a:bodyPr lIns="0" tIns="0" rIns="0" bIns="0" rtlCol="0" anchor="t">
             <a:spAutoFit/>
           </a:bodyPr>
           <a:lstStyle/>
@@ -4138,7 +4200,7 @@
               </a:lnSpc>
             </a:pPr>
             <a:r>
-              <a:rPr lang="en-US" sz="2814" b="true">
+              <a:rPr lang="en-US" sz="2814" b="1">
                 <a:solidFill>
                   <a:srgbClr val="000000"/>
                 </a:solidFill>
@@ -4154,12 +4216,12 @@
       </p:sp>
       <p:sp>
         <p:nvSpPr>
-          <p:cNvPr name="TextBox 13" id="13"/>
-          <p:cNvSpPr txBox="true"/>
+          <p:cNvPr id="13" name="TextBox 13"/>
+          <p:cNvSpPr txBox="1"/>
           <p:nvPr/>
         </p:nvSpPr>
         <p:spPr>
-          <a:xfrm rot="0">
+          <a:xfrm>
             <a:off x="1063990" y="5530949"/>
             <a:ext cx="7258461" cy="2218957"/>
           </a:xfrm>
@@ -4168,7 +4230,7 @@
           </a:prstGeom>
         </p:spPr>
         <p:txBody>
-          <a:bodyPr anchor="t" rtlCol="false" tIns="0" lIns="0" bIns="0" rIns="0">
+          <a:bodyPr lIns="0" tIns="0" rIns="0" bIns="0" rtlCol="0" anchor="t">
             <a:spAutoFit/>
           </a:bodyPr>
           <a:lstStyle/>
@@ -4179,7 +4241,7 @@
               </a:lnSpc>
             </a:pPr>
             <a:r>
-              <a:rPr lang="en-US" sz="3159" b="true">
+              <a:rPr lang="en-US" sz="3159" b="1">
                 <a:solidFill>
                   <a:srgbClr val="FFFFFF"/>
                 </a:solidFill>
@@ -4195,12 +4257,12 @@
       </p:sp>
       <p:sp>
         <p:nvSpPr>
-          <p:cNvPr name="TextBox 14" id="14"/>
-          <p:cNvSpPr txBox="true"/>
+          <p:cNvPr id="14" name="TextBox 14"/>
+          <p:cNvSpPr txBox="1"/>
           <p:nvPr/>
         </p:nvSpPr>
         <p:spPr>
-          <a:xfrm rot="0">
+          <a:xfrm>
             <a:off x="10909987" y="1532077"/>
             <a:ext cx="2900531" cy="450832"/>
           </a:xfrm>
@@ -4209,7 +4271,7 @@
           </a:prstGeom>
         </p:spPr>
         <p:txBody>
-          <a:bodyPr anchor="t" rtlCol="false" tIns="0" lIns="0" bIns="0" rIns="0">
+          <a:bodyPr lIns="0" tIns="0" rIns="0" bIns="0" rtlCol="0" anchor="t">
             <a:spAutoFit/>
           </a:bodyPr>
           <a:lstStyle/>
@@ -4236,12 +4298,12 @@
       </p:sp>
       <p:sp>
         <p:nvSpPr>
-          <p:cNvPr name="TextBox 15" id="15"/>
-          <p:cNvSpPr txBox="true"/>
+          <p:cNvPr id="15" name="TextBox 15"/>
+          <p:cNvSpPr txBox="1"/>
           <p:nvPr/>
         </p:nvSpPr>
         <p:spPr>
-          <a:xfrm rot="0">
+          <a:xfrm>
             <a:off x="10614903" y="2037834"/>
             <a:ext cx="7149247" cy="7024329"/>
           </a:xfrm>
@@ -4250,7 +4312,7 @@
           </a:prstGeom>
         </p:spPr>
         <p:txBody>
-          <a:bodyPr anchor="t" rtlCol="false" tIns="0" lIns="0" bIns="0" rIns="0">
+          <a:bodyPr lIns="0" tIns="0" rIns="0" bIns="0" rtlCol="0" anchor="t">
             <a:spAutoFit/>
           </a:bodyPr>
           <a:lstStyle/>
@@ -4493,13 +4555,14 @@
 </file>
 
 <file path=ppt/slides/slide3.xml><?xml version="1.0" encoding="utf-8"?>
-<p:sld xmlns:p="http://schemas.openxmlformats.org/presentationml/2006/main" xmlns:a="http://schemas.openxmlformats.org/drawingml/2006/main" xmlns:r="http://schemas.openxmlformats.org/officeDocument/2006/relationships">
+<p:sld xmlns:a="http://schemas.openxmlformats.org/drawingml/2006/main" xmlns:r="http://schemas.openxmlformats.org/officeDocument/2006/relationships" xmlns:p="http://schemas.openxmlformats.org/presentationml/2006/main">
   <p:cSld>
     <p:bg>
       <p:bgPr>
         <a:solidFill>
           <a:srgbClr val="121723"/>
         </a:solidFill>
+        <a:effectLst/>
       </p:bgPr>
     </p:bg>
     <p:spTree>
@@ -4518,12 +4581,12 @@
       </p:grpSpPr>
       <p:sp>
         <p:nvSpPr>
-          <p:cNvPr name="Freeform 2" id="2"/>
+          <p:cNvPr id="2" name="Freeform 2"/>
           <p:cNvSpPr/>
           <p:nvPr/>
         </p:nvSpPr>
         <p:spPr>
-          <a:xfrm flipH="false" flipV="false" rot="0">
+          <a:xfrm>
             <a:off x="1063990" y="1028700"/>
             <a:ext cx="1276643" cy="968653"/>
           </a:xfrm>
@@ -4532,9 +4595,9 @@
             <a:gdLst/>
             <a:ahLst/>
             <a:cxnLst/>
-            <a:rect r="r" b="b" t="t" l="l"/>
+            <a:rect l="l" t="t" r="r" b="b"/>
             <a:pathLst>
-              <a:path h="968653" w="1276643">
+              <a:path w="1276643" h="968653">
                 <a:moveTo>
                   <a:pt x="0" y="0"/>
                 </a:moveTo>
@@ -4563,19 +4626,26 @@
               </a:extLst>
             </a:blip>
             <a:stretch>
-              <a:fillRect l="0" t="0" r="0" b="0"/>
+              <a:fillRect/>
             </a:stretch>
           </a:blipFill>
         </p:spPr>
-      </p:sp>
-      <p:sp>
-        <p:nvSpPr>
-          <p:cNvPr name="Freeform 3" id="3"/>
+        <p:txBody>
+          <a:bodyPr/>
+          <a:lstStyle/>
+          <a:p>
+            <a:endParaRPr lang="ro-MD"/>
+          </a:p>
+        </p:txBody>
+      </p:sp>
+      <p:sp>
+        <p:nvSpPr>
+          <p:cNvPr id="3" name="Freeform 3"/>
           <p:cNvSpPr/>
           <p:nvPr/>
         </p:nvSpPr>
         <p:spPr>
-          <a:xfrm flipH="false" flipV="false" rot="0">
+          <a:xfrm>
             <a:off x="14434606" y="-2176128"/>
             <a:ext cx="4971028" cy="5072477"/>
           </a:xfrm>
@@ -4584,9 +4654,9 @@
             <a:gdLst/>
             <a:ahLst/>
             <a:cxnLst/>
-            <a:rect r="r" b="b" t="t" l="l"/>
+            <a:rect l="l" t="t" r="r" b="b"/>
             <a:pathLst>
-              <a:path h="5072477" w="4971028">
+              <a:path w="4971028" h="5072477">
                 <a:moveTo>
                   <a:pt x="0" y="0"/>
                 </a:moveTo>
@@ -4615,19 +4685,26 @@
               </a:extLst>
             </a:blip>
             <a:stretch>
-              <a:fillRect l="0" t="0" r="0" b="0"/>
+              <a:fillRect/>
             </a:stretch>
           </a:blipFill>
         </p:spPr>
-      </p:sp>
-      <p:sp>
-        <p:nvSpPr>
-          <p:cNvPr name="Freeform 4" id="4"/>
+        <p:txBody>
+          <a:bodyPr/>
+          <a:lstStyle/>
+          <a:p>
+            <a:endParaRPr lang="ro-MD"/>
+          </a:p>
+        </p:txBody>
+      </p:sp>
+      <p:sp>
+        <p:nvSpPr>
+          <p:cNvPr id="4" name="Freeform 4"/>
           <p:cNvSpPr/>
           <p:nvPr/>
         </p:nvSpPr>
         <p:spPr>
-          <a:xfrm flipH="false" flipV="false" rot="0">
+          <a:xfrm>
             <a:off x="14773786" y="8197282"/>
             <a:ext cx="4971028" cy="1352363"/>
           </a:xfrm>
@@ -4636,9 +4713,9 @@
             <a:gdLst/>
             <a:ahLst/>
             <a:cxnLst/>
-            <a:rect r="r" b="b" t="t" l="l"/>
+            <a:rect l="l" t="t" r="r" b="b"/>
             <a:pathLst>
-              <a:path h="1352363" w="4971028">
+              <a:path w="4971028" h="1352363">
                 <a:moveTo>
                   <a:pt x="0" y="0"/>
                 </a:moveTo>
@@ -4667,19 +4744,26 @@
               </a:extLst>
             </a:blip>
             <a:stretch>
-              <a:fillRect l="0" t="-275082" r="0" b="0"/>
+              <a:fillRect t="-275082"/>
             </a:stretch>
           </a:blipFill>
         </p:spPr>
+        <p:txBody>
+          <a:bodyPr/>
+          <a:lstStyle/>
+          <a:p>
+            <a:endParaRPr lang="ro-MD"/>
+          </a:p>
+        </p:txBody>
       </p:sp>
       <p:grpSp>
         <p:nvGrpSpPr>
-          <p:cNvPr name="Group 5" id="5"/>
+          <p:cNvPr id="5" name="Group 5"/>
           <p:cNvGrpSpPr/>
           <p:nvPr/>
         </p:nvGrpSpPr>
         <p:grpSpPr>
-          <a:xfrm rot="0">
+          <a:xfrm>
             <a:off x="10237132" y="1235669"/>
             <a:ext cx="7904789" cy="8499645"/>
             <a:chOff x="0" y="0"/>
@@ -4688,12 +4772,12 @@
         </p:grpSpPr>
         <p:sp>
           <p:nvSpPr>
-            <p:cNvPr name="Freeform 6" id="6"/>
+            <p:cNvPr id="6" name="Freeform 6"/>
             <p:cNvSpPr/>
             <p:nvPr/>
           </p:nvSpPr>
           <p:spPr>
-            <a:xfrm flipH="false" flipV="false" rot="0">
+            <a:xfrm>
               <a:off x="0" y="0"/>
               <a:ext cx="2137586" cy="2298445"/>
             </a:xfrm>
@@ -4702,9 +4786,9 @@
               <a:gdLst/>
               <a:ahLst/>
               <a:cxnLst/>
-              <a:rect r="r" b="b" t="t" l="l"/>
+              <a:rect l="l" t="t" r="r" b="b"/>
               <a:pathLst>
-                <a:path h="2298445" w="2137586">
+                <a:path w="2137586" h="2298445">
                   <a:moveTo>
                     <a:pt x="49949" y="0"/>
                   </a:moveTo>
@@ -4748,11 +4832,18 @@
               <a:srgbClr val="FFFFFF"/>
             </a:solidFill>
           </p:spPr>
+          <p:txBody>
+            <a:bodyPr/>
+            <a:lstStyle/>
+            <a:p>
+              <a:endParaRPr lang="ro-MD"/>
+            </a:p>
+          </p:txBody>
         </p:sp>
         <p:sp>
           <p:nvSpPr>
-            <p:cNvPr name="TextBox 7" id="7"/>
-            <p:cNvSpPr txBox="true"/>
+            <p:cNvPr id="7" name="TextBox 7"/>
+            <p:cNvSpPr txBox="1"/>
             <p:nvPr/>
           </p:nvSpPr>
           <p:spPr>
@@ -4765,7 +4856,7 @@
             </a:prstGeom>
           </p:spPr>
           <p:txBody>
-            <a:bodyPr anchor="ctr" rtlCol="false" tIns="50800" lIns="50800" bIns="50800" rIns="50800"/>
+            <a:bodyPr lIns="50800" tIns="50800" rIns="50800" bIns="50800" rtlCol="0" anchor="ctr"/>
             <a:lstStyle/>
             <a:p>
               <a:pPr algn="ctr">
@@ -4773,18 +4864,19 @@
                   <a:spcPts val="2598"/>
                 </a:lnSpc>
               </a:pPr>
+              <a:endParaRPr/>
             </a:p>
           </p:txBody>
         </p:sp>
       </p:grpSp>
       <p:sp>
         <p:nvSpPr>
-          <p:cNvPr name="Freeform 8" id="8"/>
+          <p:cNvPr id="8" name="Freeform 8"/>
           <p:cNvSpPr/>
           <p:nvPr/>
         </p:nvSpPr>
         <p:spPr>
-          <a:xfrm flipH="false" flipV="false" rot="0">
+          <a:xfrm>
             <a:off x="8808225" y="4044878"/>
             <a:ext cx="5965561" cy="2171366"/>
           </a:xfrm>
@@ -4793,9 +4885,9 @@
             <a:gdLst/>
             <a:ahLst/>
             <a:cxnLst/>
-            <a:rect r="r" b="b" t="t" l="l"/>
+            <a:rect l="l" t="t" r="r" b="b"/>
             <a:pathLst>
-              <a:path h="2171366" w="5965561">
+              <a:path w="5965561" h="2171366">
                 <a:moveTo>
                   <a:pt x="0" y="0"/>
                 </a:moveTo>
@@ -4824,19 +4916,26 @@
               </a:extLst>
             </a:blip>
             <a:stretch>
-              <a:fillRect l="0" t="0" r="0" b="-220861"/>
+              <a:fillRect b="-220861"/>
             </a:stretch>
           </a:blipFill>
         </p:spPr>
-      </p:sp>
-      <p:sp>
-        <p:nvSpPr>
-          <p:cNvPr name="TextBox 9" id="9"/>
-          <p:cNvSpPr txBox="true"/>
+        <p:txBody>
+          <a:bodyPr/>
+          <a:lstStyle/>
+          <a:p>
+            <a:endParaRPr lang="ro-MD"/>
+          </a:p>
+        </p:txBody>
+      </p:sp>
+      <p:sp>
+        <p:nvSpPr>
+          <p:cNvPr id="9" name="TextBox 9"/>
+          <p:cNvSpPr txBox="1"/>
           <p:nvPr/>
         </p:nvSpPr>
         <p:spPr>
-          <a:xfrm rot="0">
+          <a:xfrm>
             <a:off x="1028700" y="2744811"/>
             <a:ext cx="7083138" cy="1372870"/>
           </a:xfrm>
@@ -4845,7 +4944,7 @@
           </a:prstGeom>
         </p:spPr>
         <p:txBody>
-          <a:bodyPr anchor="t" rtlCol="false" tIns="0" lIns="0" bIns="0" rIns="0">
+          <a:bodyPr lIns="0" tIns="0" rIns="0" bIns="0" rtlCol="0" anchor="t">
             <a:spAutoFit/>
           </a:bodyPr>
           <a:lstStyle/>
@@ -4872,12 +4971,12 @@
       </p:sp>
       <p:sp>
         <p:nvSpPr>
-          <p:cNvPr name="TextBox 10" id="10"/>
-          <p:cNvSpPr txBox="true"/>
+          <p:cNvPr id="10" name="TextBox 10"/>
+          <p:cNvSpPr txBox="1"/>
           <p:nvPr/>
         </p:nvSpPr>
         <p:spPr>
-          <a:xfrm rot="0">
+          <a:xfrm>
             <a:off x="1028700" y="4681418"/>
             <a:ext cx="1893496" cy="449142"/>
           </a:xfrm>
@@ -4886,7 +4985,7 @@
           </a:prstGeom>
         </p:spPr>
         <p:txBody>
-          <a:bodyPr anchor="t" rtlCol="false" tIns="0" lIns="0" bIns="0" rIns="0">
+          <a:bodyPr lIns="0" tIns="0" rIns="0" bIns="0" rtlCol="0" anchor="t">
             <a:spAutoFit/>
           </a:bodyPr>
           <a:lstStyle/>
@@ -4897,7 +4996,7 @@
               </a:lnSpc>
             </a:pPr>
             <a:r>
-              <a:rPr lang="en-US" sz="3123" b="true">
+              <a:rPr lang="en-US" sz="3123" b="1">
                 <a:solidFill>
                   <a:srgbClr val="E7FF2F"/>
                 </a:solidFill>
@@ -4913,12 +5012,12 @@
       </p:sp>
       <p:sp>
         <p:nvSpPr>
-          <p:cNvPr name="TextBox 11" id="11"/>
-          <p:cNvSpPr txBox="true"/>
+          <p:cNvPr id="11" name="TextBox 11"/>
+          <p:cNvSpPr txBox="1"/>
           <p:nvPr/>
         </p:nvSpPr>
         <p:spPr>
-          <a:xfrm rot="0">
+          <a:xfrm>
             <a:off x="9048650" y="4937878"/>
             <a:ext cx="645849" cy="404448"/>
           </a:xfrm>
@@ -4927,7 +5026,7 @@
           </a:prstGeom>
         </p:spPr>
         <p:txBody>
-          <a:bodyPr anchor="t" rtlCol="false" tIns="0" lIns="0" bIns="0" rIns="0">
+          <a:bodyPr lIns="0" tIns="0" rIns="0" bIns="0" rtlCol="0" anchor="t">
             <a:spAutoFit/>
           </a:bodyPr>
           <a:lstStyle/>
@@ -4938,7 +5037,7 @@
               </a:lnSpc>
             </a:pPr>
             <a:r>
-              <a:rPr lang="en-US" sz="2814" b="true">
+              <a:rPr lang="en-US" sz="2814" b="1">
                 <a:solidFill>
                   <a:srgbClr val="000000"/>
                 </a:solidFill>
@@ -4954,12 +5053,12 @@
       </p:sp>
       <p:sp>
         <p:nvSpPr>
-          <p:cNvPr name="TextBox 12" id="12"/>
-          <p:cNvSpPr txBox="true"/>
+          <p:cNvPr id="12" name="TextBox 12"/>
+          <p:cNvSpPr txBox="1"/>
           <p:nvPr/>
         </p:nvSpPr>
         <p:spPr>
-          <a:xfrm rot="0">
+          <a:xfrm>
             <a:off x="9478613" y="6990382"/>
             <a:ext cx="645849" cy="404414"/>
           </a:xfrm>
@@ -4968,7 +5067,7 @@
           </a:prstGeom>
         </p:spPr>
         <p:txBody>
-          <a:bodyPr anchor="t" rtlCol="false" tIns="0" lIns="0" bIns="0" rIns="0">
+          <a:bodyPr lIns="0" tIns="0" rIns="0" bIns="0" rtlCol="0" anchor="t">
             <a:spAutoFit/>
           </a:bodyPr>
           <a:lstStyle/>
@@ -4979,7 +5078,7 @@
               </a:lnSpc>
             </a:pPr>
             <a:r>
-              <a:rPr lang="en-US" sz="2814" b="true">
+              <a:rPr lang="en-US" sz="2814" b="1">
                 <a:solidFill>
                   <a:srgbClr val="000000"/>
                 </a:solidFill>
@@ -4995,12 +5094,12 @@
       </p:sp>
       <p:sp>
         <p:nvSpPr>
-          <p:cNvPr name="TextBox 13" id="13"/>
-          <p:cNvSpPr txBox="true"/>
+          <p:cNvPr id="13" name="TextBox 13"/>
+          <p:cNvSpPr txBox="1"/>
           <p:nvPr/>
         </p:nvSpPr>
         <p:spPr>
-          <a:xfrm rot="0">
+          <a:xfrm>
             <a:off x="1063990" y="5521424"/>
             <a:ext cx="7487749" cy="1921927"/>
           </a:xfrm>
@@ -5009,7 +5108,7 @@
           </a:prstGeom>
         </p:spPr>
         <p:txBody>
-          <a:bodyPr anchor="t" rtlCol="false" tIns="0" lIns="0" bIns="0" rIns="0">
+          <a:bodyPr lIns="0" tIns="0" rIns="0" bIns="0" rtlCol="0" anchor="t">
             <a:spAutoFit/>
           </a:bodyPr>
           <a:lstStyle/>
@@ -5020,7 +5119,7 @@
               </a:lnSpc>
             </a:pPr>
             <a:r>
-              <a:rPr lang="en-US" sz="3658" b="true">
+              <a:rPr lang="en-US" sz="3658" b="1">
                 <a:solidFill>
                   <a:srgbClr val="FFFFFF"/>
                 </a:solidFill>
@@ -5038,17 +5137,26 @@
                 <a:spcPts val="5121"/>
               </a:lnSpc>
             </a:pPr>
-          </a:p>
-        </p:txBody>
-      </p:sp>
-      <p:sp>
-        <p:nvSpPr>
-          <p:cNvPr name="TextBox 14" id="14"/>
-          <p:cNvSpPr txBox="true"/>
+            <a:endParaRPr lang="en-US" sz="3658" b="1">
+              <a:solidFill>
+                <a:srgbClr val="FFFFFF"/>
+              </a:solidFill>
+              <a:latin typeface="Neue Montreal Bold"/>
+              <a:ea typeface="Neue Montreal Bold"/>
+              <a:cs typeface="Neue Montreal Bold"/>
+              <a:sym typeface="Neue Montreal Bold"/>
+            </a:endParaRPr>
+          </a:p>
+        </p:txBody>
+      </p:sp>
+      <p:sp>
+        <p:nvSpPr>
+          <p:cNvPr id="14" name="TextBox 14"/>
+          <p:cNvSpPr txBox="1"/>
           <p:nvPr/>
         </p:nvSpPr>
         <p:spPr>
-          <a:xfrm rot="0">
+          <a:xfrm>
             <a:off x="10909987" y="1532077"/>
             <a:ext cx="2900531" cy="450832"/>
           </a:xfrm>
@@ -5057,7 +5165,7 @@
           </a:prstGeom>
         </p:spPr>
         <p:txBody>
-          <a:bodyPr anchor="t" rtlCol="false" tIns="0" lIns="0" bIns="0" rIns="0">
+          <a:bodyPr lIns="0" tIns="0" rIns="0" bIns="0" rtlCol="0" anchor="t">
             <a:spAutoFit/>
           </a:bodyPr>
           <a:lstStyle/>
@@ -5084,12 +5192,12 @@
       </p:sp>
       <p:sp>
         <p:nvSpPr>
-          <p:cNvPr name="TextBox 15" id="15"/>
-          <p:cNvSpPr txBox="true"/>
+          <p:cNvPr id="15" name="TextBox 15"/>
+          <p:cNvSpPr txBox="1"/>
           <p:nvPr/>
         </p:nvSpPr>
         <p:spPr>
-          <a:xfrm rot="0">
+          <a:xfrm>
             <a:off x="10614903" y="2037834"/>
             <a:ext cx="7149247" cy="7024329"/>
           </a:xfrm>
@@ -5098,7 +5206,7 @@
           </a:prstGeom>
         </p:spPr>
         <p:txBody>
-          <a:bodyPr anchor="t" rtlCol="false" tIns="0" lIns="0" bIns="0" rIns="0">
+          <a:bodyPr lIns="0" tIns="0" rIns="0" bIns="0" rtlCol="0" anchor="t">
             <a:spAutoFit/>
           </a:bodyPr>
           <a:lstStyle/>
@@ -5322,13 +5430,14 @@
 </file>
 
 <file path=ppt/slides/slide4.xml><?xml version="1.0" encoding="utf-8"?>
-<p:sld xmlns:p="http://schemas.openxmlformats.org/presentationml/2006/main" xmlns:a="http://schemas.openxmlformats.org/drawingml/2006/main" xmlns:r="http://schemas.openxmlformats.org/officeDocument/2006/relationships">
+<p:sld xmlns:a="http://schemas.openxmlformats.org/drawingml/2006/main" xmlns:r="http://schemas.openxmlformats.org/officeDocument/2006/relationships" xmlns:p="http://schemas.openxmlformats.org/presentationml/2006/main">
   <p:cSld>
     <p:bg>
       <p:bgPr>
         <a:solidFill>
           <a:srgbClr val="121723"/>
         </a:solidFill>
+        <a:effectLst/>
       </p:bgPr>
     </p:bg>
     <p:spTree>
@@ -5347,12 +5456,12 @@
       </p:grpSpPr>
       <p:sp>
         <p:nvSpPr>
-          <p:cNvPr name="Freeform 2" id="2"/>
+          <p:cNvPr id="2" name="Freeform 2"/>
           <p:cNvSpPr/>
           <p:nvPr/>
         </p:nvSpPr>
         <p:spPr>
-          <a:xfrm flipH="false" flipV="false" rot="0">
+          <a:xfrm>
             <a:off x="1063990" y="1028700"/>
             <a:ext cx="1276643" cy="968653"/>
           </a:xfrm>
@@ -5361,9 +5470,9 @@
             <a:gdLst/>
             <a:ahLst/>
             <a:cxnLst/>
-            <a:rect r="r" b="b" t="t" l="l"/>
+            <a:rect l="l" t="t" r="r" b="b"/>
             <a:pathLst>
-              <a:path h="968653" w="1276643">
+              <a:path w="1276643" h="968653">
                 <a:moveTo>
                   <a:pt x="0" y="0"/>
                 </a:moveTo>
@@ -5392,19 +5501,26 @@
               </a:extLst>
             </a:blip>
             <a:stretch>
-              <a:fillRect l="0" t="0" r="0" b="0"/>
+              <a:fillRect/>
             </a:stretch>
           </a:blipFill>
         </p:spPr>
-      </p:sp>
-      <p:sp>
-        <p:nvSpPr>
-          <p:cNvPr name="Freeform 3" id="3"/>
+        <p:txBody>
+          <a:bodyPr/>
+          <a:lstStyle/>
+          <a:p>
+            <a:endParaRPr lang="ro-MD"/>
+          </a:p>
+        </p:txBody>
+      </p:sp>
+      <p:sp>
+        <p:nvSpPr>
+          <p:cNvPr id="3" name="Freeform 3"/>
           <p:cNvSpPr/>
           <p:nvPr/>
         </p:nvSpPr>
         <p:spPr>
-          <a:xfrm flipH="false" flipV="false" rot="0">
+          <a:xfrm>
             <a:off x="-804089" y="8123318"/>
             <a:ext cx="7064034" cy="4114800"/>
           </a:xfrm>
@@ -5413,9 +5529,9 @@
             <a:gdLst/>
             <a:ahLst/>
             <a:cxnLst/>
-            <a:rect r="r" b="b" t="t" l="l"/>
+            <a:rect l="l" t="t" r="r" b="b"/>
             <a:pathLst>
-              <a:path h="4114800" w="7064034">
+              <a:path w="7064034" h="4114800">
                 <a:moveTo>
                   <a:pt x="0" y="0"/>
                 </a:moveTo>
@@ -5444,19 +5560,26 @@
               </a:extLst>
             </a:blip>
             <a:stretch>
-              <a:fillRect l="0" t="0" r="0" b="0"/>
+              <a:fillRect/>
             </a:stretch>
           </a:blipFill>
         </p:spPr>
-      </p:sp>
-      <p:sp>
-        <p:nvSpPr>
-          <p:cNvPr name="TextBox 4" id="4"/>
-          <p:cNvSpPr txBox="true"/>
+        <p:txBody>
+          <a:bodyPr/>
+          <a:lstStyle/>
+          <a:p>
+            <a:endParaRPr lang="ro-MD"/>
+          </a:p>
+        </p:txBody>
+      </p:sp>
+      <p:sp>
+        <p:nvSpPr>
+          <p:cNvPr id="4" name="TextBox 4"/>
+          <p:cNvSpPr txBox="1"/>
           <p:nvPr/>
         </p:nvSpPr>
         <p:spPr>
-          <a:xfrm rot="0">
+          <a:xfrm>
             <a:off x="1028700" y="3147433"/>
             <a:ext cx="7597568" cy="2715895"/>
           </a:xfrm>
@@ -5465,7 +5588,7 @@
           </a:prstGeom>
         </p:spPr>
         <p:txBody>
-          <a:bodyPr anchor="t" rtlCol="false" tIns="0" lIns="0" bIns="0" rIns="0">
+          <a:bodyPr lIns="0" tIns="0" rIns="0" bIns="0" rtlCol="0" anchor="t">
             <a:spAutoFit/>
           </a:bodyPr>
           <a:lstStyle/>
@@ -5492,12 +5615,12 @@
       </p:sp>
       <p:sp>
         <p:nvSpPr>
-          <p:cNvPr name="TextBox 5" id="5"/>
-          <p:cNvSpPr txBox="true"/>
+          <p:cNvPr id="5" name="TextBox 5"/>
+          <p:cNvSpPr txBox="1"/>
           <p:nvPr/>
         </p:nvSpPr>
         <p:spPr>
-          <a:xfrm rot="0">
+          <a:xfrm>
             <a:off x="9525831" y="366047"/>
             <a:ext cx="4460096" cy="449142"/>
           </a:xfrm>
@@ -5506,7 +5629,7 @@
           </a:prstGeom>
         </p:spPr>
         <p:txBody>
-          <a:bodyPr anchor="t" rtlCol="false" tIns="0" lIns="0" bIns="0" rIns="0">
+          <a:bodyPr lIns="0" tIns="0" rIns="0" bIns="0" rtlCol="0" anchor="t">
             <a:spAutoFit/>
           </a:bodyPr>
           <a:lstStyle/>
@@ -5517,7 +5640,7 @@
               </a:lnSpc>
             </a:pPr>
             <a:r>
-              <a:rPr lang="en-US" sz="3123" b="true">
+              <a:rPr lang="en-US" sz="3123" b="1">
                 <a:solidFill>
                   <a:srgbClr val="E7FF2F"/>
                 </a:solidFill>
@@ -5533,12 +5656,12 @@
       </p:sp>
       <p:grpSp>
         <p:nvGrpSpPr>
-          <p:cNvPr name="Group 6" id="6"/>
+          <p:cNvPr id="6" name="Group 6"/>
           <p:cNvGrpSpPr/>
           <p:nvPr/>
         </p:nvGrpSpPr>
         <p:grpSpPr>
-          <a:xfrm rot="0">
+          <a:xfrm>
             <a:off x="9144000" y="1352225"/>
             <a:ext cx="5530396" cy="9093132"/>
             <a:chOff x="0" y="0"/>
@@ -5547,12 +5670,12 @@
         </p:grpSpPr>
         <p:sp>
           <p:nvSpPr>
-            <p:cNvPr name="Freeform 7" id="7"/>
+            <p:cNvPr id="7" name="Freeform 7"/>
             <p:cNvSpPr/>
             <p:nvPr/>
           </p:nvSpPr>
           <p:spPr>
-            <a:xfrm flipH="false" flipV="false" rot="0">
+            <a:xfrm>
               <a:off x="0" y="0"/>
               <a:ext cx="1495511" cy="2458933"/>
             </a:xfrm>
@@ -5561,9 +5684,9 @@
               <a:gdLst/>
               <a:ahLst/>
               <a:cxnLst/>
-              <a:rect r="r" b="b" t="t" l="l"/>
+              <a:rect l="l" t="t" r="r" b="b"/>
               <a:pathLst>
-                <a:path h="2458933" w="1495511">
+                <a:path w="1495511" h="2458933">
                   <a:moveTo>
                     <a:pt x="71394" y="0"/>
                   </a:moveTo>
@@ -5627,11 +5750,18 @@
               <a:srgbClr val="FFFFFF"/>
             </a:solidFill>
           </p:spPr>
+          <p:txBody>
+            <a:bodyPr/>
+            <a:lstStyle/>
+            <a:p>
+              <a:endParaRPr lang="ro-MD"/>
+            </a:p>
+          </p:txBody>
         </p:sp>
         <p:sp>
           <p:nvSpPr>
-            <p:cNvPr name="TextBox 8" id="8"/>
-            <p:cNvSpPr txBox="true"/>
+            <p:cNvPr id="8" name="TextBox 8"/>
+            <p:cNvSpPr txBox="1"/>
             <p:nvPr/>
           </p:nvSpPr>
           <p:spPr>
@@ -5644,7 +5774,7 @@
             </a:prstGeom>
           </p:spPr>
           <p:txBody>
-            <a:bodyPr anchor="ctr" rtlCol="false" tIns="50800" lIns="50800" bIns="50800" rIns="50800"/>
+            <a:bodyPr lIns="50800" tIns="50800" rIns="50800" bIns="50800" rtlCol="0" anchor="ctr"/>
             <a:lstStyle/>
             <a:p>
               <a:pPr algn="ctr">
@@ -5652,18 +5782,19 @@
                   <a:spcPts val="2598"/>
                 </a:lnSpc>
               </a:pPr>
+              <a:endParaRPr/>
             </a:p>
           </p:txBody>
         </p:sp>
       </p:grpSp>
       <p:sp>
         <p:nvSpPr>
-          <p:cNvPr name="TextBox 9" id="9"/>
-          <p:cNvSpPr txBox="true"/>
+          <p:cNvPr id="9" name="TextBox 9"/>
+          <p:cNvSpPr txBox="1"/>
           <p:nvPr/>
         </p:nvSpPr>
         <p:spPr>
-          <a:xfrm rot="0">
+          <a:xfrm>
             <a:off x="9803495" y="1417542"/>
             <a:ext cx="3904768" cy="8853474"/>
           </a:xfrm>
@@ -5672,7 +5803,7 @@
           </a:prstGeom>
         </p:spPr>
         <p:txBody>
-          <a:bodyPr anchor="t" rtlCol="false" tIns="0" lIns="0" bIns="0" rIns="0">
+          <a:bodyPr lIns="0" tIns="0" rIns="0" bIns="0" rtlCol="0" anchor="t">
             <a:spAutoFit/>
           </a:bodyPr>
           <a:lstStyle/>
@@ -5683,7 +5814,7 @@
               </a:lnSpc>
             </a:pPr>
             <a:r>
-              <a:rPr lang="en-US" sz="1688" b="true">
+              <a:rPr lang="en-US" sz="1688" b="1">
                 <a:solidFill>
                   <a:srgbClr val="000000"/>
                 </a:solidFill>
@@ -5702,7 +5833,7 @@
               </a:lnSpc>
             </a:pPr>
             <a:r>
-              <a:rPr lang="en-US" sz="1688" b="true">
+              <a:rPr lang="en-US" sz="1688" b="1">
                 <a:solidFill>
                   <a:srgbClr val="000000"/>
                 </a:solidFill>
@@ -5721,7 +5852,7 @@
               </a:lnSpc>
             </a:pPr>
             <a:r>
-              <a:rPr lang="en-US" sz="1688" b="true">
+              <a:rPr lang="en-US" sz="1688" b="1">
                 <a:solidFill>
                   <a:srgbClr val="000000"/>
                 </a:solidFill>
@@ -5740,7 +5871,7 @@
               </a:lnSpc>
             </a:pPr>
             <a:r>
-              <a:rPr lang="en-US" sz="1688" b="true">
+              <a:rPr lang="en-US" sz="1688" b="1">
                 <a:solidFill>
                   <a:srgbClr val="000000"/>
                 </a:solidFill>
@@ -5759,7 +5890,7 @@
               </a:lnSpc>
             </a:pPr>
             <a:r>
-              <a:rPr lang="en-US" sz="1688" b="true">
+              <a:rPr lang="en-US" sz="1688" b="1">
                 <a:solidFill>
                   <a:srgbClr val="000000"/>
                 </a:solidFill>
@@ -5778,7 +5909,7 @@
               </a:lnSpc>
             </a:pPr>
             <a:r>
-              <a:rPr lang="en-US" sz="1688" b="true">
+              <a:rPr lang="en-US" sz="1688" b="1">
                 <a:solidFill>
                   <a:srgbClr val="000000"/>
                 </a:solidFill>
@@ -5797,7 +5928,7 @@
               </a:lnSpc>
             </a:pPr>
             <a:r>
-              <a:rPr lang="en-US" sz="1688" b="true">
+              <a:rPr lang="en-US" sz="1688" b="1">
                 <a:solidFill>
                   <a:srgbClr val="000000"/>
                 </a:solidFill>
@@ -5816,7 +5947,7 @@
               </a:lnSpc>
             </a:pPr>
             <a:r>
-              <a:rPr lang="en-US" sz="1688" b="true">
+              <a:rPr lang="en-US" sz="1688" b="1">
                 <a:solidFill>
                   <a:srgbClr val="000000"/>
                 </a:solidFill>
@@ -5835,7 +5966,7 @@
               </a:lnSpc>
             </a:pPr>
             <a:r>
-              <a:rPr lang="en-US" sz="1688" b="true">
+              <a:rPr lang="en-US" sz="1688" b="1">
                 <a:solidFill>
                   <a:srgbClr val="000000"/>
                 </a:solidFill>
@@ -5854,7 +5985,7 @@
               </a:lnSpc>
             </a:pPr>
             <a:r>
-              <a:rPr lang="en-US" sz="1688" b="true">
+              <a:rPr lang="en-US" sz="1688" b="1">
                 <a:solidFill>
                   <a:srgbClr val="000000"/>
                 </a:solidFill>
@@ -5873,7 +6004,7 @@
               </a:lnSpc>
             </a:pPr>
             <a:r>
-              <a:rPr lang="en-US" sz="1688" b="true">
+              <a:rPr lang="en-US" sz="1688" b="1">
                 <a:solidFill>
                   <a:srgbClr val="000000"/>
                 </a:solidFill>
@@ -5892,7 +6023,7 @@
               </a:lnSpc>
             </a:pPr>
             <a:r>
-              <a:rPr lang="en-US" sz="1688" b="true">
+              <a:rPr lang="en-US" sz="1688" b="1">
                 <a:solidFill>
                   <a:srgbClr val="000000"/>
                 </a:solidFill>
@@ -5911,7 +6042,7 @@
               </a:lnSpc>
             </a:pPr>
             <a:r>
-              <a:rPr lang="en-US" sz="1688" b="true">
+              <a:rPr lang="en-US" sz="1688" b="1">
                 <a:solidFill>
                   <a:srgbClr val="000000"/>
                 </a:solidFill>
@@ -5930,7 +6061,7 @@
               </a:lnSpc>
             </a:pPr>
             <a:r>
-              <a:rPr lang="en-US" sz="1688" b="true">
+              <a:rPr lang="en-US" sz="1688" b="1">
                 <a:solidFill>
                   <a:srgbClr val="000000"/>
                 </a:solidFill>
@@ -5949,7 +6080,7 @@
               </a:lnSpc>
             </a:pPr>
             <a:r>
-              <a:rPr lang="en-US" sz="1688" b="true">
+              <a:rPr lang="en-US" sz="1688" b="1">
                 <a:solidFill>
                   <a:srgbClr val="000000"/>
                 </a:solidFill>
@@ -5968,7 +6099,7 @@
               </a:lnSpc>
             </a:pPr>
             <a:r>
-              <a:rPr lang="en-US" sz="1688" b="true">
+              <a:rPr lang="en-US" sz="1688" b="1">
                 <a:solidFill>
                   <a:srgbClr val="000000"/>
                 </a:solidFill>
@@ -5987,7 +6118,7 @@
               </a:lnSpc>
             </a:pPr>
             <a:r>
-              <a:rPr lang="en-US" sz="1688" b="true">
+              <a:rPr lang="en-US" sz="1688" b="1">
                 <a:solidFill>
                   <a:srgbClr val="000000"/>
                 </a:solidFill>
@@ -6006,7 +6137,7 @@
               </a:lnSpc>
             </a:pPr>
             <a:r>
-              <a:rPr lang="en-US" sz="1688" b="true">
+              <a:rPr lang="en-US" sz="1688" b="1">
                 <a:solidFill>
                   <a:srgbClr val="000000"/>
                 </a:solidFill>
@@ -6025,7 +6156,7 @@
               </a:lnSpc>
             </a:pPr>
             <a:r>
-              <a:rPr lang="en-US" sz="1688" b="true">
+              <a:rPr lang="en-US" sz="1688" b="1">
                 <a:solidFill>
                   <a:srgbClr val="000000"/>
                 </a:solidFill>
@@ -6044,7 +6175,7 @@
               </a:lnSpc>
             </a:pPr>
             <a:r>
-              <a:rPr lang="en-US" sz="1688" b="true">
+              <a:rPr lang="en-US" sz="1688" b="1">
                 <a:solidFill>
                   <a:srgbClr val="000000"/>
                 </a:solidFill>
@@ -6063,7 +6194,7 @@
               </a:lnSpc>
             </a:pPr>
             <a:r>
-              <a:rPr lang="en-US" sz="1688" b="true">
+              <a:rPr lang="en-US" sz="1688" b="1">
                 <a:solidFill>
                   <a:srgbClr val="000000"/>
                 </a:solidFill>
@@ -6082,7 +6213,7 @@
               </a:lnSpc>
             </a:pPr>
             <a:r>
-              <a:rPr lang="en-US" sz="1688" b="true">
+              <a:rPr lang="en-US" sz="1688" b="1">
                 <a:solidFill>
                   <a:srgbClr val="000000"/>
                 </a:solidFill>
@@ -6101,7 +6232,7 @@
               </a:lnSpc>
             </a:pPr>
             <a:r>
-              <a:rPr lang="en-US" sz="1688" b="true">
+              <a:rPr lang="en-US" sz="1688" b="1">
                 <a:solidFill>
                   <a:srgbClr val="000000"/>
                 </a:solidFill>
@@ -6120,7 +6251,7 @@
               </a:lnSpc>
             </a:pPr>
             <a:r>
-              <a:rPr lang="en-US" sz="1688" b="true">
+              <a:rPr lang="en-US" sz="1688" b="1">
                 <a:solidFill>
                   <a:srgbClr val="000000"/>
                 </a:solidFill>
@@ -6139,7 +6270,7 @@
               </a:lnSpc>
             </a:pPr>
             <a:r>
-              <a:rPr lang="en-US" sz="1688" b="true">
+              <a:rPr lang="en-US" sz="1688" b="1">
                 <a:solidFill>
                   <a:srgbClr val="000000"/>
                 </a:solidFill>
@@ -6158,7 +6289,7 @@
               </a:lnSpc>
             </a:pPr>
             <a:r>
-              <a:rPr lang="en-US" sz="1688" b="true">
+              <a:rPr lang="en-US" sz="1688" b="1">
                 <a:solidFill>
                   <a:srgbClr val="000000"/>
                 </a:solidFill>
@@ -6177,7 +6308,7 @@
               </a:lnSpc>
             </a:pPr>
             <a:r>
-              <a:rPr lang="en-US" sz="1688" b="true">
+              <a:rPr lang="en-US" sz="1688" b="1">
                 <a:solidFill>
                   <a:srgbClr val="000000"/>
                 </a:solidFill>
@@ -6196,7 +6327,7 @@
               </a:lnSpc>
             </a:pPr>
             <a:r>
-              <a:rPr lang="en-US" sz="1688" b="true">
+              <a:rPr lang="en-US" sz="1688" b="1">
                 <a:solidFill>
                   <a:srgbClr val="000000"/>
                 </a:solidFill>
@@ -6215,7 +6346,7 @@
               </a:lnSpc>
             </a:pPr>
             <a:r>
-              <a:rPr lang="en-US" sz="1688" b="true">
+              <a:rPr lang="en-US" sz="1688" b="1">
                 <a:solidFill>
                   <a:srgbClr val="000000"/>
                 </a:solidFill>
@@ -6234,7 +6365,7 @@
               </a:lnSpc>
             </a:pPr>
             <a:r>
-              <a:rPr lang="en-US" sz="1688" b="true">
+              <a:rPr lang="en-US" sz="1688" b="1">
                 <a:solidFill>
                   <a:srgbClr val="000000"/>
                 </a:solidFill>
@@ -6250,12 +6381,12 @@
       </p:sp>
       <p:sp>
         <p:nvSpPr>
-          <p:cNvPr name="Freeform 10" id="10"/>
+          <p:cNvPr id="10" name="Freeform 10"/>
           <p:cNvSpPr/>
           <p:nvPr/>
         </p:nvSpPr>
         <p:spPr>
-          <a:xfrm flipH="true" flipV="false" rot="0">
+          <a:xfrm flipH="1">
             <a:off x="15622624" y="-2032957"/>
             <a:ext cx="5811471" cy="3385182"/>
           </a:xfrm>
@@ -6264,9 +6395,9 @@
             <a:gdLst/>
             <a:ahLst/>
             <a:cxnLst/>
-            <a:rect r="r" b="b" t="t" l="l"/>
+            <a:rect l="l" t="t" r="r" b="b"/>
             <a:pathLst>
-              <a:path h="3385182" w="5811471">
+              <a:path w="5811471" h="3385182">
                 <a:moveTo>
                   <a:pt x="5811471" y="0"/>
                 </a:moveTo>
@@ -6295,19 +6426,26 @@
               </a:extLst>
             </a:blip>
             <a:stretch>
-              <a:fillRect l="0" t="0" r="0" b="0"/>
+              <a:fillRect/>
             </a:stretch>
           </a:blipFill>
         </p:spPr>
-      </p:sp>
-      <p:sp>
-        <p:nvSpPr>
-          <p:cNvPr name="TextBox 11" id="11"/>
-          <p:cNvSpPr txBox="true"/>
+        <p:txBody>
+          <a:bodyPr/>
+          <a:lstStyle/>
+          <a:p>
+            <a:endParaRPr lang="ro-MD"/>
+          </a:p>
+        </p:txBody>
+      </p:sp>
+      <p:sp>
+        <p:nvSpPr>
+          <p:cNvPr id="11" name="TextBox 11"/>
+          <p:cNvSpPr txBox="1"/>
           <p:nvPr/>
         </p:nvSpPr>
         <p:spPr>
-          <a:xfrm rot="0">
+          <a:xfrm>
             <a:off x="9525831" y="919408"/>
             <a:ext cx="5148565" cy="290499"/>
           </a:xfrm>
@@ -6316,7 +6454,7 @@
           </a:prstGeom>
         </p:spPr>
         <p:txBody>
-          <a:bodyPr anchor="t" rtlCol="false" tIns="0" lIns="0" bIns="0" rIns="0">
+          <a:bodyPr lIns="0" tIns="0" rIns="0" bIns="0" rtlCol="0" anchor="t">
             <a:spAutoFit/>
           </a:bodyPr>
           <a:lstStyle/>
@@ -6327,7 +6465,7 @@
               </a:lnSpc>
             </a:pPr>
             <a:r>
-              <a:rPr lang="en-US" sz="1688" b="true">
+              <a:rPr lang="en-US" sz="1688" b="1">
                 <a:solidFill>
                   <a:srgbClr val="FFFFFF"/>
                 </a:solidFill>
@@ -6346,20 +6484,21 @@
   <p:clrMapOvr>
     <a:masterClrMapping/>
   </p:clrMapOvr>
-  <p:transition spd="fast">
-    <p:wipe dir="l"/>
+  <p:transition>
+    <p:wipe/>
   </p:transition>
 </p:sld>
 </file>
 
 <file path=ppt/slides/slide5.xml><?xml version="1.0" encoding="utf-8"?>
-<p:sld xmlns:p="http://schemas.openxmlformats.org/presentationml/2006/main" xmlns:a="http://schemas.openxmlformats.org/drawingml/2006/main" xmlns:r="http://schemas.openxmlformats.org/officeDocument/2006/relationships">
+<p:sld xmlns:a="http://schemas.openxmlformats.org/drawingml/2006/main" xmlns:r="http://schemas.openxmlformats.org/officeDocument/2006/relationships" xmlns:p="http://schemas.openxmlformats.org/presentationml/2006/main">
   <p:cSld>
     <p:bg>
       <p:bgPr>
         <a:solidFill>
           <a:srgbClr val="121723"/>
         </a:solidFill>
+        <a:effectLst/>
       </p:bgPr>
     </p:bg>
     <p:spTree>
@@ -6378,12 +6517,12 @@
       </p:grpSpPr>
       <p:sp>
         <p:nvSpPr>
-          <p:cNvPr name="Freeform 2" id="2"/>
+          <p:cNvPr id="2" name="Freeform 2"/>
           <p:cNvSpPr/>
           <p:nvPr/>
         </p:nvSpPr>
         <p:spPr>
-          <a:xfrm flipH="false" flipV="false" rot="0">
+          <a:xfrm>
             <a:off x="1063990" y="1028700"/>
             <a:ext cx="1276643" cy="968653"/>
           </a:xfrm>
@@ -6392,9 +6531,9 @@
             <a:gdLst/>
             <a:ahLst/>
             <a:cxnLst/>
-            <a:rect r="r" b="b" t="t" l="l"/>
+            <a:rect l="l" t="t" r="r" b="b"/>
             <a:pathLst>
-              <a:path h="968653" w="1276643">
+              <a:path w="1276643" h="968653">
                 <a:moveTo>
                   <a:pt x="0" y="0"/>
                 </a:moveTo>
@@ -6423,19 +6562,26 @@
               </a:extLst>
             </a:blip>
             <a:stretch>
-              <a:fillRect l="0" t="0" r="0" b="0"/>
+              <a:fillRect/>
             </a:stretch>
           </a:blipFill>
         </p:spPr>
-      </p:sp>
-      <p:sp>
-        <p:nvSpPr>
-          <p:cNvPr name="Freeform 3" id="3"/>
+        <p:txBody>
+          <a:bodyPr/>
+          <a:lstStyle/>
+          <a:p>
+            <a:endParaRPr lang="ro-MD"/>
+          </a:p>
+        </p:txBody>
+      </p:sp>
+      <p:sp>
+        <p:nvSpPr>
+          <p:cNvPr id="3" name="Freeform 3"/>
           <p:cNvSpPr/>
           <p:nvPr/>
         </p:nvSpPr>
         <p:spPr>
-          <a:xfrm flipH="false" flipV="false" rot="0">
+          <a:xfrm>
             <a:off x="-804089" y="8123318"/>
             <a:ext cx="7064034" cy="4114800"/>
           </a:xfrm>
@@ -6444,9 +6590,9 @@
             <a:gdLst/>
             <a:ahLst/>
             <a:cxnLst/>
-            <a:rect r="r" b="b" t="t" l="l"/>
+            <a:rect l="l" t="t" r="r" b="b"/>
             <a:pathLst>
-              <a:path h="4114800" w="7064034">
+              <a:path w="7064034" h="4114800">
                 <a:moveTo>
                   <a:pt x="0" y="0"/>
                 </a:moveTo>
@@ -6475,19 +6621,26 @@
               </a:extLst>
             </a:blip>
             <a:stretch>
-              <a:fillRect l="0" t="0" r="0" b="0"/>
+              <a:fillRect/>
             </a:stretch>
           </a:blipFill>
         </p:spPr>
-      </p:sp>
-      <p:sp>
-        <p:nvSpPr>
-          <p:cNvPr name="TextBox 4" id="4"/>
-          <p:cNvSpPr txBox="true"/>
+        <p:txBody>
+          <a:bodyPr/>
+          <a:lstStyle/>
+          <a:p>
+            <a:endParaRPr lang="ro-MD"/>
+          </a:p>
+        </p:txBody>
+      </p:sp>
+      <p:sp>
+        <p:nvSpPr>
+          <p:cNvPr id="4" name="TextBox 4"/>
+          <p:cNvSpPr txBox="1"/>
           <p:nvPr/>
         </p:nvSpPr>
         <p:spPr>
-          <a:xfrm rot="0">
+          <a:xfrm>
             <a:off x="1028700" y="3147433"/>
             <a:ext cx="7597568" cy="2715895"/>
           </a:xfrm>
@@ -6496,7 +6649,7 @@
           </a:prstGeom>
         </p:spPr>
         <p:txBody>
-          <a:bodyPr anchor="t" rtlCol="false" tIns="0" lIns="0" bIns="0" rIns="0">
+          <a:bodyPr lIns="0" tIns="0" rIns="0" bIns="0" rtlCol="0" anchor="t">
             <a:spAutoFit/>
           </a:bodyPr>
           <a:lstStyle/>
@@ -6523,12 +6676,12 @@
       </p:sp>
       <p:sp>
         <p:nvSpPr>
-          <p:cNvPr name="TextBox 5" id="5"/>
-          <p:cNvSpPr txBox="true"/>
+          <p:cNvPr id="5" name="TextBox 5"/>
+          <p:cNvSpPr txBox="1"/>
           <p:nvPr/>
         </p:nvSpPr>
         <p:spPr>
-          <a:xfrm rot="0">
+          <a:xfrm>
             <a:off x="9525831" y="366047"/>
             <a:ext cx="4460096" cy="449142"/>
           </a:xfrm>
@@ -6537,7 +6690,7 @@
           </a:prstGeom>
         </p:spPr>
         <p:txBody>
-          <a:bodyPr anchor="t" rtlCol="false" tIns="0" lIns="0" bIns="0" rIns="0">
+          <a:bodyPr lIns="0" tIns="0" rIns="0" bIns="0" rtlCol="0" anchor="t">
             <a:spAutoFit/>
           </a:bodyPr>
           <a:lstStyle/>
@@ -6548,7 +6701,7 @@
               </a:lnSpc>
             </a:pPr>
             <a:r>
-              <a:rPr lang="en-US" sz="3123" b="true">
+              <a:rPr lang="en-US" sz="3123" b="1">
                 <a:solidFill>
                   <a:srgbClr val="E7FF2F"/>
                 </a:solidFill>
@@ -6564,12 +6717,12 @@
       </p:sp>
       <p:grpSp>
         <p:nvGrpSpPr>
-          <p:cNvPr name="Group 6" id="6"/>
+          <p:cNvPr id="6" name="Group 6"/>
           <p:cNvGrpSpPr/>
           <p:nvPr/>
         </p:nvGrpSpPr>
         <p:grpSpPr>
-          <a:xfrm rot="0">
+          <a:xfrm>
             <a:off x="9144000" y="1352225"/>
             <a:ext cx="5530396" cy="9093132"/>
             <a:chOff x="0" y="0"/>
@@ -6578,12 +6731,12 @@
         </p:grpSpPr>
         <p:sp>
           <p:nvSpPr>
-            <p:cNvPr name="Freeform 7" id="7"/>
+            <p:cNvPr id="7" name="Freeform 7"/>
             <p:cNvSpPr/>
             <p:nvPr/>
           </p:nvSpPr>
           <p:spPr>
-            <a:xfrm flipH="false" flipV="false" rot="0">
+            <a:xfrm>
               <a:off x="0" y="0"/>
               <a:ext cx="1495511" cy="2458933"/>
             </a:xfrm>
@@ -6592,9 +6745,9 @@
               <a:gdLst/>
               <a:ahLst/>
               <a:cxnLst/>
-              <a:rect r="r" b="b" t="t" l="l"/>
+              <a:rect l="l" t="t" r="r" b="b"/>
               <a:pathLst>
-                <a:path h="2458933" w="1495511">
+                <a:path w="1495511" h="2458933">
                   <a:moveTo>
                     <a:pt x="71394" y="0"/>
                   </a:moveTo>
@@ -6658,11 +6811,18 @@
               <a:srgbClr val="FFFFFF"/>
             </a:solidFill>
           </p:spPr>
+          <p:txBody>
+            <a:bodyPr/>
+            <a:lstStyle/>
+            <a:p>
+              <a:endParaRPr lang="ro-MD"/>
+            </a:p>
+          </p:txBody>
         </p:sp>
         <p:sp>
           <p:nvSpPr>
-            <p:cNvPr name="TextBox 8" id="8"/>
-            <p:cNvSpPr txBox="true"/>
+            <p:cNvPr id="8" name="TextBox 8"/>
+            <p:cNvSpPr txBox="1"/>
             <p:nvPr/>
           </p:nvSpPr>
           <p:spPr>
@@ -6675,7 +6835,7 @@
             </a:prstGeom>
           </p:spPr>
           <p:txBody>
-            <a:bodyPr anchor="ctr" rtlCol="false" tIns="50800" lIns="50800" bIns="50800" rIns="50800"/>
+            <a:bodyPr lIns="50800" tIns="50800" rIns="50800" bIns="50800" rtlCol="0" anchor="ctr"/>
             <a:lstStyle/>
             <a:p>
               <a:pPr algn="ctr">
@@ -6683,18 +6843,19 @@
                   <a:spcPts val="2598"/>
                 </a:lnSpc>
               </a:pPr>
+              <a:endParaRPr/>
             </a:p>
           </p:txBody>
         </p:sp>
       </p:grpSp>
       <p:sp>
         <p:nvSpPr>
-          <p:cNvPr name="TextBox 9" id="9"/>
-          <p:cNvSpPr txBox="true"/>
+          <p:cNvPr id="9" name="TextBox 9"/>
+          <p:cNvSpPr txBox="1"/>
           <p:nvPr/>
         </p:nvSpPr>
         <p:spPr>
-          <a:xfrm rot="0">
+          <a:xfrm>
             <a:off x="9803495" y="1417542"/>
             <a:ext cx="3904768" cy="8853474"/>
           </a:xfrm>
@@ -6703,7 +6864,7 @@
           </a:prstGeom>
         </p:spPr>
         <p:txBody>
-          <a:bodyPr anchor="t" rtlCol="false" tIns="0" lIns="0" bIns="0" rIns="0">
+          <a:bodyPr lIns="0" tIns="0" rIns="0" bIns="0" rtlCol="0" anchor="t">
             <a:spAutoFit/>
           </a:bodyPr>
           <a:lstStyle/>
@@ -6714,7 +6875,7 @@
               </a:lnSpc>
             </a:pPr>
             <a:r>
-              <a:rPr lang="en-US" sz="1688" b="true">
+              <a:rPr lang="en-US" sz="1688" b="1">
                 <a:solidFill>
                   <a:srgbClr val="000000"/>
                 </a:solidFill>
@@ -6733,7 +6894,7 @@
               </a:lnSpc>
             </a:pPr>
             <a:r>
-              <a:rPr lang="en-US" sz="1688" b="true">
+              <a:rPr lang="en-US" sz="1688" b="1">
                 <a:solidFill>
                   <a:srgbClr val="000000"/>
                 </a:solidFill>
@@ -6752,7 +6913,7 @@
               </a:lnSpc>
             </a:pPr>
             <a:r>
-              <a:rPr lang="en-US" sz="1688" b="true">
+              <a:rPr lang="en-US" sz="1688" b="1">
                 <a:solidFill>
                   <a:srgbClr val="000000"/>
                 </a:solidFill>
@@ -6771,7 +6932,7 @@
               </a:lnSpc>
             </a:pPr>
             <a:r>
-              <a:rPr lang="en-US" sz="1688" b="true">
+              <a:rPr lang="en-US" sz="1688" b="1">
                 <a:solidFill>
                   <a:srgbClr val="000000"/>
                 </a:solidFill>
@@ -6790,7 +6951,7 @@
               </a:lnSpc>
             </a:pPr>
             <a:r>
-              <a:rPr lang="en-US" sz="1688" b="true">
+              <a:rPr lang="en-US" sz="1688" b="1">
                 <a:solidFill>
                   <a:srgbClr val="000000"/>
                 </a:solidFill>
@@ -6809,7 +6970,7 @@
               </a:lnSpc>
             </a:pPr>
             <a:r>
-              <a:rPr lang="en-US" sz="1688" b="true">
+              <a:rPr lang="en-US" sz="1688" b="1">
                 <a:solidFill>
                   <a:srgbClr val="000000"/>
                 </a:solidFill>
@@ -6828,7 +6989,7 @@
               </a:lnSpc>
             </a:pPr>
             <a:r>
-              <a:rPr lang="en-US" sz="1688" b="true">
+              <a:rPr lang="en-US" sz="1688" b="1">
                 <a:solidFill>
                   <a:srgbClr val="000000"/>
                 </a:solidFill>
@@ -6847,7 +7008,7 @@
               </a:lnSpc>
             </a:pPr>
             <a:r>
-              <a:rPr lang="en-US" sz="1688" b="true">
+              <a:rPr lang="en-US" sz="1688" b="1">
                 <a:solidFill>
                   <a:srgbClr val="000000"/>
                 </a:solidFill>
@@ -6866,7 +7027,7 @@
               </a:lnSpc>
             </a:pPr>
             <a:r>
-              <a:rPr lang="en-US" sz="1688" b="true">
+              <a:rPr lang="en-US" sz="1688" b="1">
                 <a:solidFill>
                   <a:srgbClr val="000000"/>
                 </a:solidFill>
@@ -6885,7 +7046,7 @@
               </a:lnSpc>
             </a:pPr>
             <a:r>
-              <a:rPr lang="en-US" sz="1688" b="true">
+              <a:rPr lang="en-US" sz="1688" b="1">
                 <a:solidFill>
                   <a:srgbClr val="000000"/>
                 </a:solidFill>
@@ -6904,7 +7065,7 @@
               </a:lnSpc>
             </a:pPr>
             <a:r>
-              <a:rPr lang="en-US" sz="1688" b="true">
+              <a:rPr lang="en-US" sz="1688" b="1">
                 <a:solidFill>
                   <a:srgbClr val="000000"/>
                 </a:solidFill>
@@ -6923,7 +7084,7 @@
               </a:lnSpc>
             </a:pPr>
             <a:r>
-              <a:rPr lang="en-US" sz="1688" b="true">
+              <a:rPr lang="en-US" sz="1688" b="1">
                 <a:solidFill>
                   <a:srgbClr val="000000"/>
                 </a:solidFill>
@@ -6942,7 +7103,7 @@
               </a:lnSpc>
             </a:pPr>
             <a:r>
-              <a:rPr lang="en-US" sz="1688" b="true">
+              <a:rPr lang="en-US" sz="1688" b="1">
                 <a:solidFill>
                   <a:srgbClr val="000000"/>
                 </a:solidFill>
@@ -6961,7 +7122,7 @@
               </a:lnSpc>
             </a:pPr>
             <a:r>
-              <a:rPr lang="en-US" sz="1688" b="true">
+              <a:rPr lang="en-US" sz="1688" b="1">
                 <a:solidFill>
                   <a:srgbClr val="000000"/>
                 </a:solidFill>
@@ -6980,7 +7141,7 @@
               </a:lnSpc>
             </a:pPr>
             <a:r>
-              <a:rPr lang="en-US" sz="1688" b="true">
+              <a:rPr lang="en-US" sz="1688" b="1">
                 <a:solidFill>
                   <a:srgbClr val="000000"/>
                 </a:solidFill>
@@ -6999,7 +7160,7 @@
               </a:lnSpc>
             </a:pPr>
             <a:r>
-              <a:rPr lang="en-US" sz="1688" b="true">
+              <a:rPr lang="en-US" sz="1688" b="1">
                 <a:solidFill>
                   <a:srgbClr val="000000"/>
                 </a:solidFill>
@@ -7018,7 +7179,7 @@
               </a:lnSpc>
             </a:pPr>
             <a:r>
-              <a:rPr lang="en-US" sz="1688" b="true">
+              <a:rPr lang="en-US" sz="1688" b="1">
                 <a:solidFill>
                   <a:srgbClr val="000000"/>
                 </a:solidFill>
@@ -7037,7 +7198,7 @@
               </a:lnSpc>
             </a:pPr>
             <a:r>
-              <a:rPr lang="en-US" sz="1688" b="true">
+              <a:rPr lang="en-US" sz="1688" b="1">
                 <a:solidFill>
                   <a:srgbClr val="000000"/>
                 </a:solidFill>
@@ -7056,7 +7217,7 @@
               </a:lnSpc>
             </a:pPr>
             <a:r>
-              <a:rPr lang="en-US" sz="1688" b="true">
+              <a:rPr lang="en-US" sz="1688" b="1">
                 <a:solidFill>
                   <a:srgbClr val="000000"/>
                 </a:solidFill>
@@ -7075,7 +7236,7 @@
               </a:lnSpc>
             </a:pPr>
             <a:r>
-              <a:rPr lang="en-US" sz="1688" b="true">
+              <a:rPr lang="en-US" sz="1688" b="1">
                 <a:solidFill>
                   <a:srgbClr val="000000"/>
                 </a:solidFill>
@@ -7094,7 +7255,7 @@
               </a:lnSpc>
             </a:pPr>
             <a:r>
-              <a:rPr lang="en-US" sz="1688" b="true">
+              <a:rPr lang="en-US" sz="1688" b="1">
                 <a:solidFill>
                   <a:srgbClr val="000000"/>
                 </a:solidFill>
@@ -7113,7 +7274,7 @@
               </a:lnSpc>
             </a:pPr>
             <a:r>
-              <a:rPr lang="en-US" sz="1688" b="true">
+              <a:rPr lang="en-US" sz="1688" b="1">
                 <a:solidFill>
                   <a:srgbClr val="000000"/>
                 </a:solidFill>
@@ -7132,7 +7293,7 @@
               </a:lnSpc>
             </a:pPr>
             <a:r>
-              <a:rPr lang="en-US" sz="1688" b="true">
+              <a:rPr lang="en-US" sz="1688" b="1">
                 <a:solidFill>
                   <a:srgbClr val="000000"/>
                 </a:solidFill>
@@ -7151,7 +7312,7 @@
               </a:lnSpc>
             </a:pPr>
             <a:r>
-              <a:rPr lang="en-US" sz="1688" b="true">
+              <a:rPr lang="en-US" sz="1688" b="1">
                 <a:solidFill>
                   <a:srgbClr val="000000"/>
                 </a:solidFill>
@@ -7170,7 +7331,7 @@
               </a:lnSpc>
             </a:pPr>
             <a:r>
-              <a:rPr lang="en-US" sz="1688" b="true">
+              <a:rPr lang="en-US" sz="1688" b="1">
                 <a:solidFill>
                   <a:srgbClr val="000000"/>
                 </a:solidFill>
@@ -7189,7 +7350,7 @@
               </a:lnSpc>
             </a:pPr>
             <a:r>
-              <a:rPr lang="en-US" sz="1688" b="true">
+              <a:rPr lang="en-US" sz="1688" b="1">
                 <a:solidFill>
                   <a:srgbClr val="000000"/>
                 </a:solidFill>
@@ -7208,7 +7369,7 @@
               </a:lnSpc>
             </a:pPr>
             <a:r>
-              <a:rPr lang="en-US" sz="1688" b="true">
+              <a:rPr lang="en-US" sz="1688" b="1">
                 <a:solidFill>
                   <a:srgbClr val="000000"/>
                 </a:solidFill>
@@ -7227,7 +7388,7 @@
               </a:lnSpc>
             </a:pPr>
             <a:r>
-              <a:rPr lang="en-US" sz="1688" b="true">
+              <a:rPr lang="en-US" sz="1688" b="1">
                 <a:solidFill>
                   <a:srgbClr val="000000"/>
                 </a:solidFill>
@@ -7246,7 +7407,7 @@
               </a:lnSpc>
             </a:pPr>
             <a:r>
-              <a:rPr lang="en-US" sz="1688" b="true">
+              <a:rPr lang="en-US" sz="1688" b="1">
                 <a:solidFill>
                   <a:srgbClr val="000000"/>
                 </a:solidFill>
@@ -7265,7 +7426,7 @@
               </a:lnSpc>
             </a:pPr>
             <a:r>
-              <a:rPr lang="en-US" sz="1688" b="true">
+              <a:rPr lang="en-US" sz="1688" b="1">
                 <a:solidFill>
                   <a:srgbClr val="000000"/>
                 </a:solidFill>
@@ -7281,12 +7442,12 @@
       </p:sp>
       <p:sp>
         <p:nvSpPr>
-          <p:cNvPr name="Freeform 10" id="10"/>
+          <p:cNvPr id="10" name="Freeform 10"/>
           <p:cNvSpPr/>
           <p:nvPr/>
         </p:nvSpPr>
         <p:spPr>
-          <a:xfrm flipH="true" flipV="false" rot="0">
+          <a:xfrm flipH="1">
             <a:off x="15622624" y="-2032957"/>
             <a:ext cx="5811471" cy="3385182"/>
           </a:xfrm>
@@ -7295,9 +7456,9 @@
             <a:gdLst/>
             <a:ahLst/>
             <a:cxnLst/>
-            <a:rect r="r" b="b" t="t" l="l"/>
+            <a:rect l="l" t="t" r="r" b="b"/>
             <a:pathLst>
-              <a:path h="3385182" w="5811471">
+              <a:path w="5811471" h="3385182">
                 <a:moveTo>
                   <a:pt x="5811471" y="0"/>
                 </a:moveTo>
@@ -7326,19 +7487,26 @@
               </a:extLst>
             </a:blip>
             <a:stretch>
-              <a:fillRect l="0" t="0" r="0" b="0"/>
+              <a:fillRect/>
             </a:stretch>
           </a:blipFill>
         </p:spPr>
-      </p:sp>
-      <p:sp>
-        <p:nvSpPr>
-          <p:cNvPr name="TextBox 11" id="11"/>
-          <p:cNvSpPr txBox="true"/>
+        <p:txBody>
+          <a:bodyPr/>
+          <a:lstStyle/>
+          <a:p>
+            <a:endParaRPr lang="ro-MD"/>
+          </a:p>
+        </p:txBody>
+      </p:sp>
+      <p:sp>
+        <p:nvSpPr>
+          <p:cNvPr id="11" name="TextBox 11"/>
+          <p:cNvSpPr txBox="1"/>
           <p:nvPr/>
         </p:nvSpPr>
         <p:spPr>
-          <a:xfrm rot="0">
+          <a:xfrm>
             <a:off x="9525831" y="919408"/>
             <a:ext cx="5148565" cy="290499"/>
           </a:xfrm>
@@ -7347,7 +7515,7 @@
           </a:prstGeom>
         </p:spPr>
         <p:txBody>
-          <a:bodyPr anchor="t" rtlCol="false" tIns="0" lIns="0" bIns="0" rIns="0">
+          <a:bodyPr lIns="0" tIns="0" rIns="0" bIns="0" rtlCol="0" anchor="t">
             <a:spAutoFit/>
           </a:bodyPr>
           <a:lstStyle/>
@@ -7358,7 +7526,7 @@
               </a:lnSpc>
             </a:pPr>
             <a:r>
-              <a:rPr lang="en-US" sz="1688" b="true">
+              <a:rPr lang="en-US" sz="1688" b="1">
                 <a:solidFill>
                   <a:srgbClr val="FFFFFF"/>
                 </a:solidFill>
@@ -7377,20 +7545,21 @@
   <p:clrMapOvr>
     <a:masterClrMapping/>
   </p:clrMapOvr>
-  <p:transition spd="fast">
-    <p:wipe dir="l"/>
+  <p:transition>
+    <p:wipe/>
   </p:transition>
 </p:sld>
 </file>
 
 <file path=ppt/slides/slide6.xml><?xml version="1.0" encoding="utf-8"?>
-<p:sld xmlns:p="http://schemas.openxmlformats.org/presentationml/2006/main" xmlns:a="http://schemas.openxmlformats.org/drawingml/2006/main" xmlns:r="http://schemas.openxmlformats.org/officeDocument/2006/relationships">
+<p:sld xmlns:a="http://schemas.openxmlformats.org/drawingml/2006/main" xmlns:r="http://schemas.openxmlformats.org/officeDocument/2006/relationships" xmlns:p="http://schemas.openxmlformats.org/presentationml/2006/main">
   <p:cSld>
     <p:bg>
       <p:bgPr>
         <a:solidFill>
           <a:srgbClr val="121723"/>
         </a:solidFill>
+        <a:effectLst/>
       </p:bgPr>
     </p:bg>
     <p:spTree>
@@ -7409,12 +7578,12 @@
       </p:grpSpPr>
       <p:sp>
         <p:nvSpPr>
-          <p:cNvPr name="Freeform 2" id="2"/>
+          <p:cNvPr id="2" name="Freeform 2"/>
           <p:cNvSpPr/>
           <p:nvPr/>
         </p:nvSpPr>
         <p:spPr>
-          <a:xfrm flipH="false" flipV="false" rot="0">
+          <a:xfrm>
             <a:off x="1063990" y="1028700"/>
             <a:ext cx="1276643" cy="968653"/>
           </a:xfrm>
@@ -7423,9 +7592,9 @@
             <a:gdLst/>
             <a:ahLst/>
             <a:cxnLst/>
-            <a:rect r="r" b="b" t="t" l="l"/>
+            <a:rect l="l" t="t" r="r" b="b"/>
             <a:pathLst>
-              <a:path h="968653" w="1276643">
+              <a:path w="1276643" h="968653">
                 <a:moveTo>
                   <a:pt x="0" y="0"/>
                 </a:moveTo>
@@ -7454,19 +7623,26 @@
               </a:extLst>
             </a:blip>
             <a:stretch>
-              <a:fillRect l="0" t="0" r="0" b="0"/>
+              <a:fillRect/>
             </a:stretch>
           </a:blipFill>
         </p:spPr>
-      </p:sp>
-      <p:sp>
-        <p:nvSpPr>
-          <p:cNvPr name="Freeform 3" id="3"/>
+        <p:txBody>
+          <a:bodyPr/>
+          <a:lstStyle/>
+          <a:p>
+            <a:endParaRPr lang="ro-MD"/>
+          </a:p>
+        </p:txBody>
+      </p:sp>
+      <p:sp>
+        <p:nvSpPr>
+          <p:cNvPr id="3" name="Freeform 3"/>
           <p:cNvSpPr/>
           <p:nvPr/>
         </p:nvSpPr>
         <p:spPr>
-          <a:xfrm flipH="true" flipV="false" rot="0">
+          <a:xfrm flipH="1">
             <a:off x="13215984" y="769952"/>
             <a:ext cx="6359560" cy="2814105"/>
           </a:xfrm>
@@ -7475,9 +7651,9 @@
             <a:gdLst/>
             <a:ahLst/>
             <a:cxnLst/>
-            <a:rect r="r" b="b" t="t" l="l"/>
+            <a:rect l="l" t="t" r="r" b="b"/>
             <a:pathLst>
-              <a:path h="2814105" w="6359560">
+              <a:path w="6359560" h="2814105">
                 <a:moveTo>
                   <a:pt x="6359560" y="0"/>
                 </a:moveTo>
@@ -7506,19 +7682,26 @@
               </a:extLst>
             </a:blip>
             <a:stretch>
-              <a:fillRect l="0" t="0" r="0" b="0"/>
+              <a:fillRect/>
             </a:stretch>
           </a:blipFill>
         </p:spPr>
+        <p:txBody>
+          <a:bodyPr/>
+          <a:lstStyle/>
+          <a:p>
+            <a:endParaRPr lang="ro-MD"/>
+          </a:p>
+        </p:txBody>
       </p:sp>
       <p:grpSp>
         <p:nvGrpSpPr>
-          <p:cNvPr name="Group 4" id="4"/>
+          <p:cNvPr id="4" name="Group 4"/>
           <p:cNvGrpSpPr/>
           <p:nvPr/>
         </p:nvGrpSpPr>
         <p:grpSpPr>
-          <a:xfrm rot="0">
+          <a:xfrm>
             <a:off x="1063990" y="4117682"/>
             <a:ext cx="2791672" cy="1621286"/>
             <a:chOff x="0" y="0"/>
@@ -7527,12 +7710,12 @@
         </p:grpSpPr>
         <p:sp>
           <p:nvSpPr>
-            <p:cNvPr name="Freeform 5" id="5"/>
+            <p:cNvPr id="5" name="Freeform 5"/>
             <p:cNvSpPr/>
             <p:nvPr/>
           </p:nvSpPr>
           <p:spPr>
-            <a:xfrm flipH="false" flipV="false" rot="0">
+            <a:xfrm>
               <a:off x="0" y="0"/>
               <a:ext cx="754914" cy="438423"/>
             </a:xfrm>
@@ -7541,9 +7724,9 @@
               <a:gdLst/>
               <a:ahLst/>
               <a:cxnLst/>
-              <a:rect r="r" b="b" t="t" l="l"/>
+              <a:rect l="l" t="t" r="r" b="b"/>
               <a:pathLst>
-                <a:path h="438423" w="754914">
+                <a:path w="754914" h="438423">
                   <a:moveTo>
                     <a:pt x="141434" y="0"/>
                   </a:moveTo>
@@ -7607,11 +7790,18 @@
               <a:srgbClr val="FFFFFF"/>
             </a:solidFill>
           </p:spPr>
+          <p:txBody>
+            <a:bodyPr/>
+            <a:lstStyle/>
+            <a:p>
+              <a:endParaRPr lang="ro-MD"/>
+            </a:p>
+          </p:txBody>
         </p:sp>
         <p:sp>
           <p:nvSpPr>
-            <p:cNvPr name="TextBox 6" id="6"/>
-            <p:cNvSpPr txBox="true"/>
+            <p:cNvPr id="6" name="TextBox 6"/>
+            <p:cNvSpPr txBox="1"/>
             <p:nvPr/>
           </p:nvSpPr>
           <p:spPr>
@@ -7624,7 +7814,7 @@
             </a:prstGeom>
           </p:spPr>
           <p:txBody>
-            <a:bodyPr anchor="ctr" rtlCol="false" tIns="50800" lIns="50800" bIns="50800" rIns="50800"/>
+            <a:bodyPr lIns="50800" tIns="50800" rIns="50800" bIns="50800" rtlCol="0" anchor="ctr"/>
             <a:lstStyle/>
             <a:p>
               <a:pPr algn="ctr">
@@ -7632,18 +7822,19 @@
                   <a:spcPts val="2598"/>
                 </a:lnSpc>
               </a:pPr>
+              <a:endParaRPr/>
             </a:p>
           </p:txBody>
         </p:sp>
       </p:grpSp>
       <p:sp>
         <p:nvSpPr>
-          <p:cNvPr name="TextBox 7" id="7"/>
-          <p:cNvSpPr txBox="true"/>
+          <p:cNvPr id="7" name="TextBox 7"/>
+          <p:cNvSpPr txBox="1"/>
           <p:nvPr/>
         </p:nvSpPr>
         <p:spPr>
-          <a:xfrm rot="0">
+          <a:xfrm>
             <a:off x="1063990" y="2404420"/>
             <a:ext cx="9934802" cy="1372870"/>
           </a:xfrm>
@@ -7652,7 +7843,7 @@
           </a:prstGeom>
         </p:spPr>
         <p:txBody>
-          <a:bodyPr anchor="t" rtlCol="false" tIns="0" lIns="0" bIns="0" rIns="0">
+          <a:bodyPr lIns="0" tIns="0" rIns="0" bIns="0" rtlCol="0" anchor="t">
             <a:spAutoFit/>
           </a:bodyPr>
           <a:lstStyle/>
@@ -7679,12 +7870,12 @@
       </p:sp>
       <p:sp>
         <p:nvSpPr>
-          <p:cNvPr name="TextBox 8" id="8"/>
-          <p:cNvSpPr txBox="true"/>
+          <p:cNvPr id="8" name="TextBox 8"/>
+          <p:cNvSpPr txBox="1"/>
           <p:nvPr/>
         </p:nvSpPr>
         <p:spPr>
-          <a:xfrm rot="0">
+          <a:xfrm>
             <a:off x="1513869" y="4487017"/>
             <a:ext cx="1891913" cy="441307"/>
           </a:xfrm>
@@ -7693,7 +7884,7 @@
           </a:prstGeom>
         </p:spPr>
         <p:txBody>
-          <a:bodyPr anchor="t" rtlCol="false" tIns="0" lIns="0" bIns="0" rIns="0">
+          <a:bodyPr lIns="0" tIns="0" rIns="0" bIns="0" rtlCol="0" anchor="t">
             <a:spAutoFit/>
           </a:bodyPr>
           <a:lstStyle/>
@@ -7704,7 +7895,7 @@
               </a:lnSpc>
             </a:pPr>
             <a:r>
-              <a:rPr lang="en-US" sz="3123" b="true">
+              <a:rPr lang="en-US" sz="3123" b="1">
                 <a:solidFill>
                   <a:srgbClr val="000000"/>
                 </a:solidFill>
@@ -7716,7 +7907,7 @@
               <a:t>Informații</a:t>
             </a:r>
             <a:r>
-              <a:rPr lang="en-US" sz="3123" b="true">
+              <a:rPr lang="en-US" sz="3123" b="1">
                 <a:solidFill>
                   <a:srgbClr val="000000"/>
                 </a:solidFill>
@@ -7732,12 +7923,12 @@
       </p:sp>
       <p:grpSp>
         <p:nvGrpSpPr>
-          <p:cNvPr name="Group 9" id="9"/>
+          <p:cNvPr id="9" name="Group 9"/>
           <p:cNvGrpSpPr/>
           <p:nvPr/>
         </p:nvGrpSpPr>
         <p:grpSpPr>
-          <a:xfrm rot="0">
+          <a:xfrm>
             <a:off x="774855" y="5173153"/>
             <a:ext cx="9243938" cy="4345238"/>
             <a:chOff x="0" y="0"/>
@@ -7746,12 +7937,12 @@
         </p:grpSpPr>
         <p:sp>
           <p:nvSpPr>
-            <p:cNvPr name="Freeform 10" id="10"/>
+            <p:cNvPr id="10" name="Freeform 10"/>
             <p:cNvSpPr/>
             <p:nvPr/>
           </p:nvSpPr>
           <p:spPr>
-            <a:xfrm flipH="false" flipV="false" rot="0">
+            <a:xfrm>
               <a:off x="0" y="0"/>
               <a:ext cx="2499714" cy="1175024"/>
             </a:xfrm>
@@ -7760,9 +7951,9 @@
               <a:gdLst/>
               <a:ahLst/>
               <a:cxnLst/>
-              <a:rect r="r" b="b" t="t" l="l"/>
+              <a:rect l="l" t="t" r="r" b="b"/>
               <a:pathLst>
-                <a:path h="1175024" w="2499714">
+                <a:path w="2499714" h="1175024">
                   <a:moveTo>
                     <a:pt x="42713" y="0"/>
                   </a:moveTo>
@@ -7826,11 +8017,18 @@
               <a:srgbClr val="FFFFFF"/>
             </a:solidFill>
           </p:spPr>
+          <p:txBody>
+            <a:bodyPr/>
+            <a:lstStyle/>
+            <a:p>
+              <a:endParaRPr lang="ro-MD"/>
+            </a:p>
+          </p:txBody>
         </p:sp>
         <p:sp>
           <p:nvSpPr>
-            <p:cNvPr name="TextBox 11" id="11"/>
-            <p:cNvSpPr txBox="true"/>
+            <p:cNvPr id="11" name="TextBox 11"/>
+            <p:cNvSpPr txBox="1"/>
             <p:nvPr/>
           </p:nvSpPr>
           <p:spPr>
@@ -7843,7 +8041,7 @@
             </a:prstGeom>
           </p:spPr>
           <p:txBody>
-            <a:bodyPr anchor="ctr" rtlCol="false" tIns="50800" lIns="50800" bIns="50800" rIns="50800"/>
+            <a:bodyPr lIns="50800" tIns="50800" rIns="50800" bIns="50800" rtlCol="0" anchor="ctr"/>
             <a:lstStyle/>
             <a:p>
               <a:pPr algn="ctr">
@@ -7851,18 +8049,19 @@
                   <a:spcPts val="2598"/>
                 </a:lnSpc>
               </a:pPr>
+              <a:endParaRPr/>
             </a:p>
           </p:txBody>
         </p:sp>
       </p:grpSp>
       <p:sp>
         <p:nvSpPr>
-          <p:cNvPr name="TextBox 12" id="12"/>
-          <p:cNvSpPr txBox="true"/>
+          <p:cNvPr id="12" name="TextBox 12"/>
+          <p:cNvSpPr txBox="1"/>
           <p:nvPr/>
         </p:nvSpPr>
         <p:spPr>
-          <a:xfrm rot="0">
+          <a:xfrm>
             <a:off x="1028700" y="5395143"/>
             <a:ext cx="8354437" cy="4123247"/>
           </a:xfrm>
@@ -7871,7 +8070,7 @@
           </a:prstGeom>
         </p:spPr>
         <p:txBody>
-          <a:bodyPr anchor="t" rtlCol="false" tIns="0" lIns="0" bIns="0" rIns="0">
+          <a:bodyPr lIns="0" tIns="0" rIns="0" bIns="0" rtlCol="0" anchor="t">
             <a:spAutoFit/>
           </a:bodyPr>
           <a:lstStyle/>
@@ -7891,8 +8090,31 @@
                 <a:cs typeface="Neue Montreal"/>
                 <a:sym typeface="Neue Montreal"/>
               </a:rPr>
-              <a:t>Ac</a:t>
-            </a:r>
+              <a:t>Acest proiect are ca scop dezvoltarea unei aplicații informatice care să permită gestionarea eficientă a informațiilor despre jucării și producătorii acestora. Datele sunt organizate în două fișiere text, Toys.txt și Manufacturer.txt, iar programul creat permite interacțiunea utilizatorului prin intermediul unui meniu intuitiv, realizând acțiuni precum afișarea, adăugarea, ștergerea și editarea informațiilor. De asemenea, sunt prevăzute funcționalități avansate, precum generarea de rapoarte, sortări și calcule statistice.</a:t>
+            </a:r>
+          </a:p>
+          <a:p>
+            <a:pPr algn="l">
+              <a:lnSpc>
+                <a:spcPts val="2524"/>
+              </a:lnSpc>
+            </a:pPr>
+            <a:endParaRPr lang="en-US" sz="1803">
+              <a:solidFill>
+                <a:srgbClr val="000000"/>
+              </a:solidFill>
+              <a:latin typeface="Neue Montreal"/>
+              <a:ea typeface="Neue Montreal"/>
+              <a:cs typeface="Neue Montreal"/>
+              <a:sym typeface="Neue Montreal"/>
+            </a:endParaRPr>
+          </a:p>
+          <a:p>
+            <a:pPr algn="l">
+              <a:lnSpc>
+                <a:spcPts val="2524"/>
+              </a:lnSpc>
+            </a:pPr>
             <a:r>
               <a:rPr lang="en-US" sz="1803">
                 <a:solidFill>
@@ -7903,7 +8125,7 @@
                 <a:cs typeface="Neue Montreal"/>
                 <a:sym typeface="Neue Montreal"/>
               </a:rPr>
-              <a:t>est proiect are ca scop dezvoltarea unei aplicații informatice care să permită gestionarea eficientă a informațiilor despre jucării și producătorii acestora. Datele sunt organizate în două fișiere text, Toys.txt și Manufacturer.txt, iar programul creat permite interacțiunea utilizatorului prin intermediul unui meniu intuitiv, realizând acțiuni precum afișarea, adăugarea, ștergerea și editarea informațiilor. De asemenea, sunt prevăzute funcționalități avansate, precum generarea de rapoarte, sortări și calcule statistice.</a:t>
+              <a:t>Proiectul este completat de o componentă practică în MS Excel, unde datele sunt importate, formatate și analizate vizual prin grafice și funcții avansate, precum și de realizarea unui raport în MS Word și o prezentare în MS PowerPoint. Împreună, aceste elemente contribuie la dezvoltarea abilităților de prelucrare și analiză a datelor, utilizând instrumente informatice moderne.</a:t>
             </a:r>
           </a:p>
           <a:p>
@@ -7912,32 +8134,15 @@
                 <a:spcPts val="2524"/>
               </a:lnSpc>
             </a:pPr>
-          </a:p>
-          <a:p>
-            <a:pPr algn="l">
-              <a:lnSpc>
-                <a:spcPts val="2524"/>
-              </a:lnSpc>
-            </a:pPr>
-            <a:r>
-              <a:rPr lang="en-US" sz="1803">
-                <a:solidFill>
-                  <a:srgbClr val="000000"/>
-                </a:solidFill>
-                <a:latin typeface="Neue Montreal"/>
-                <a:ea typeface="Neue Montreal"/>
-                <a:cs typeface="Neue Montreal"/>
-                <a:sym typeface="Neue Montreal"/>
-              </a:rPr>
-              <a:t>Proiectul este completat de o componentă practică în MS Excel, unde datele sunt importate, formatate și analizate vizual prin grafice și funcții avansate, precum și de realizarea unui raport în MS Word și o prezentare în MS PowerPoint. Împreună, aceste elemente contribuie la dezvoltarea abilităților de prelucrare și analiză a datelor, utilizând instrumente informatice moderne.</a:t>
-            </a:r>
-          </a:p>
-          <a:p>
-            <a:pPr algn="l">
-              <a:lnSpc>
-                <a:spcPts val="2524"/>
-              </a:lnSpc>
-            </a:pPr>
+            <a:endParaRPr lang="en-US" sz="1803">
+              <a:solidFill>
+                <a:srgbClr val="000000"/>
+              </a:solidFill>
+              <a:latin typeface="Neue Montreal"/>
+              <a:ea typeface="Neue Montreal"/>
+              <a:cs typeface="Neue Montreal"/>
+              <a:sym typeface="Neue Montreal"/>
+            </a:endParaRPr>
           </a:p>
         </p:txBody>
       </p:sp>
@@ -7946,20 +8151,21 @@
   <p:clrMapOvr>
     <a:masterClrMapping/>
   </p:clrMapOvr>
-  <p:transition spd="fast">
-    <p:wipe dir="l"/>
+  <p:transition>
+    <p:wipe/>
   </p:transition>
 </p:sld>
 </file>
 
 <file path=ppt/slides/slide7.xml><?xml version="1.0" encoding="utf-8"?>
-<p:sld xmlns:p="http://schemas.openxmlformats.org/presentationml/2006/main" xmlns:a="http://schemas.openxmlformats.org/drawingml/2006/main" xmlns:r="http://schemas.openxmlformats.org/officeDocument/2006/relationships">
+<p:sld xmlns:a="http://schemas.openxmlformats.org/drawingml/2006/main" xmlns:r="http://schemas.openxmlformats.org/officeDocument/2006/relationships" xmlns:p="http://schemas.openxmlformats.org/presentationml/2006/main">
   <p:cSld>
     <p:bg>
       <p:bgPr>
         <a:solidFill>
           <a:srgbClr val="121723"/>
         </a:solidFill>
+        <a:effectLst/>
       </p:bgPr>
     </p:bg>
     <p:spTree>
@@ -7978,12 +8184,12 @@
       </p:grpSpPr>
       <p:sp>
         <p:nvSpPr>
-          <p:cNvPr name="Freeform 2" id="2"/>
+          <p:cNvPr id="2" name="Freeform 2"/>
           <p:cNvSpPr/>
           <p:nvPr/>
         </p:nvSpPr>
         <p:spPr>
-          <a:xfrm flipH="false" flipV="false" rot="0">
+          <a:xfrm>
             <a:off x="1063990" y="1028700"/>
             <a:ext cx="1276643" cy="968653"/>
           </a:xfrm>
@@ -7992,9 +8198,9 @@
             <a:gdLst/>
             <a:ahLst/>
             <a:cxnLst/>
-            <a:rect r="r" b="b" t="t" l="l"/>
+            <a:rect l="l" t="t" r="r" b="b"/>
             <a:pathLst>
-              <a:path h="968653" w="1276643">
+              <a:path w="1276643" h="968653">
                 <a:moveTo>
                   <a:pt x="0" y="0"/>
                 </a:moveTo>
@@ -8023,19 +8229,26 @@
               </a:extLst>
             </a:blip>
             <a:stretch>
-              <a:fillRect l="0" t="0" r="0" b="0"/>
+              <a:fillRect/>
             </a:stretch>
           </a:blipFill>
         </p:spPr>
-      </p:sp>
-      <p:sp>
-        <p:nvSpPr>
-          <p:cNvPr name="Freeform 3" id="3"/>
+        <p:txBody>
+          <a:bodyPr/>
+          <a:lstStyle/>
+          <a:p>
+            <a:endParaRPr lang="ro-MD"/>
+          </a:p>
+        </p:txBody>
+      </p:sp>
+      <p:sp>
+        <p:nvSpPr>
+          <p:cNvPr id="3" name="Freeform 3"/>
           <p:cNvSpPr/>
           <p:nvPr/>
         </p:nvSpPr>
         <p:spPr>
-          <a:xfrm flipH="true" flipV="false" rot="0">
+          <a:xfrm flipH="1">
             <a:off x="8726104" y="-2838585"/>
             <a:ext cx="7517757" cy="4886542"/>
           </a:xfrm>
@@ -8044,9 +8257,9 @@
             <a:gdLst/>
             <a:ahLst/>
             <a:cxnLst/>
-            <a:rect r="r" b="b" t="t" l="l"/>
+            <a:rect l="l" t="t" r="r" b="b"/>
             <a:pathLst>
-              <a:path h="4886542" w="7517757">
+              <a:path w="7517757" h="4886542">
                 <a:moveTo>
                   <a:pt x="7517757" y="0"/>
                 </a:moveTo>
@@ -8075,19 +8288,26 @@
               </a:extLst>
             </a:blip>
             <a:stretch>
-              <a:fillRect l="0" t="0" r="0" b="0"/>
+              <a:fillRect/>
             </a:stretch>
           </a:blipFill>
         </p:spPr>
-      </p:sp>
-      <p:sp>
-        <p:nvSpPr>
-          <p:cNvPr name="Freeform 4" id="4"/>
+        <p:txBody>
+          <a:bodyPr/>
+          <a:lstStyle/>
+          <a:p>
+            <a:endParaRPr lang="ro-MD"/>
+          </a:p>
+        </p:txBody>
+      </p:sp>
+      <p:sp>
+        <p:nvSpPr>
+          <p:cNvPr id="4" name="Freeform 4"/>
           <p:cNvSpPr/>
           <p:nvPr/>
         </p:nvSpPr>
         <p:spPr>
-          <a:xfrm flipH="true" flipV="false" rot="-5400000">
+          <a:xfrm rot="-5400000" flipH="1">
             <a:off x="15597169" y="2402483"/>
             <a:ext cx="7517757" cy="4886542"/>
           </a:xfrm>
@@ -8096,9 +8316,9 @@
             <a:gdLst/>
             <a:ahLst/>
             <a:cxnLst/>
-            <a:rect r="r" b="b" t="t" l="l"/>
+            <a:rect l="l" t="t" r="r" b="b"/>
             <a:pathLst>
-              <a:path h="4886542" w="7517757">
+              <a:path w="7517757" h="4886542">
                 <a:moveTo>
                   <a:pt x="7517757" y="0"/>
                 </a:moveTo>
@@ -8127,19 +8347,26 @@
               </a:extLst>
             </a:blip>
             <a:stretch>
-              <a:fillRect l="0" t="0" r="0" b="0"/>
+              <a:fillRect/>
             </a:stretch>
           </a:blipFill>
         </p:spPr>
+        <p:txBody>
+          <a:bodyPr/>
+          <a:lstStyle/>
+          <a:p>
+            <a:endParaRPr lang="ro-MD"/>
+          </a:p>
+        </p:txBody>
       </p:sp>
       <p:grpSp>
         <p:nvGrpSpPr>
-          <p:cNvPr name="Group 5" id="5"/>
+          <p:cNvPr id="5" name="Group 5"/>
           <p:cNvGrpSpPr/>
           <p:nvPr/>
         </p:nvGrpSpPr>
         <p:grpSpPr>
-          <a:xfrm rot="0">
+          <a:xfrm>
             <a:off x="13019365" y="-1437290"/>
             <a:ext cx="5900633" cy="5900633"/>
             <a:chOff x="0" y="0"/>
@@ -8148,12 +8375,12 @@
         </p:grpSpPr>
         <p:sp>
           <p:nvSpPr>
-            <p:cNvPr name="Freeform 6" id="6"/>
+            <p:cNvPr id="6" name="Freeform 6"/>
             <p:cNvSpPr/>
             <p:nvPr/>
           </p:nvSpPr>
           <p:spPr>
-            <a:xfrm flipH="false" flipV="false" rot="0">
+            <a:xfrm>
               <a:off x="0" y="0"/>
               <a:ext cx="812800" cy="812800"/>
             </a:xfrm>
@@ -8162,9 +8389,9 @@
               <a:gdLst/>
               <a:ahLst/>
               <a:cxnLst/>
-              <a:rect r="r" b="b" t="t" l="l"/>
+              <a:rect l="l" t="t" r="r" b="b"/>
               <a:pathLst>
-                <a:path h="812800" w="812800">
+                <a:path w="812800" h="812800">
                   <a:moveTo>
                     <a:pt x="406400" y="0"/>
                   </a:moveTo>
@@ -8195,7 +8422,7 @@
             <a:blipFill>
               <a:blip r:embed="rId6"/>
               <a:stretch>
-                <a:fillRect l="-32135" t="0" r="-20672" b="-1872"/>
+                <a:fillRect l="-32135" r="-20672" b="-1872"/>
               </a:stretch>
             </a:blipFill>
             <a:ln w="200025" cap="sq">
@@ -8206,16 +8433,23 @@
               <a:miter/>
             </a:ln>
           </p:spPr>
+          <p:txBody>
+            <a:bodyPr/>
+            <a:lstStyle/>
+            <a:p>
+              <a:endParaRPr lang="ro-MD"/>
+            </a:p>
+          </p:txBody>
         </p:sp>
       </p:grpSp>
       <p:sp>
         <p:nvSpPr>
-          <p:cNvPr name="Freeform 7" id="7"/>
+          <p:cNvPr id="7" name="Freeform 7"/>
           <p:cNvSpPr/>
           <p:nvPr/>
         </p:nvSpPr>
         <p:spPr>
-          <a:xfrm flipH="false" flipV="false" rot="0">
+          <a:xfrm>
             <a:off x="8152509" y="1028700"/>
             <a:ext cx="7958898" cy="8910990"/>
           </a:xfrm>
@@ -8224,9 +8458,9 @@
             <a:gdLst/>
             <a:ahLst/>
             <a:cxnLst/>
-            <a:rect r="r" b="b" t="t" l="l"/>
+            <a:rect l="l" t="t" r="r" b="b"/>
             <a:pathLst>
-              <a:path h="8910990" w="7958898">
+              <a:path w="7958898" h="8910990">
                 <a:moveTo>
                   <a:pt x="0" y="0"/>
                 </a:moveTo>
@@ -8249,19 +8483,26 @@
           <a:blipFill>
             <a:blip r:embed="rId7"/>
             <a:stretch>
-              <a:fillRect l="0" t="0" r="0" b="0"/>
+              <a:fillRect/>
             </a:stretch>
           </a:blipFill>
         </p:spPr>
-      </p:sp>
-      <p:sp>
-        <p:nvSpPr>
-          <p:cNvPr name="TextBox 8" id="8"/>
-          <p:cNvSpPr txBox="true"/>
+        <p:txBody>
+          <a:bodyPr/>
+          <a:lstStyle/>
+          <a:p>
+            <a:endParaRPr lang="ro-MD"/>
+          </a:p>
+        </p:txBody>
+      </p:sp>
+      <p:sp>
+        <p:nvSpPr>
+          <p:cNvPr id="8" name="TextBox 8"/>
+          <p:cNvSpPr txBox="1"/>
           <p:nvPr/>
         </p:nvSpPr>
         <p:spPr>
-          <a:xfrm rot="0">
+          <a:xfrm>
             <a:off x="526519" y="2614981"/>
             <a:ext cx="7181301" cy="5401945"/>
           </a:xfrm>
@@ -8270,7 +8511,7 @@
           </a:prstGeom>
         </p:spPr>
         <p:txBody>
-          <a:bodyPr anchor="t" rtlCol="false" tIns="0" lIns="0" bIns="0" rIns="0">
+          <a:bodyPr lIns="0" tIns="0" rIns="0" bIns="0" rtlCol="0" anchor="t">
             <a:spAutoFit/>
           </a:bodyPr>
           <a:lstStyle/>
@@ -8357,20 +8598,21 @@
   <p:clrMapOvr>
     <a:masterClrMapping/>
   </p:clrMapOvr>
-  <p:transition spd="fast">
-    <p:wipe dir="l"/>
+  <p:transition>
+    <p:wipe/>
   </p:transition>
 </p:sld>
 </file>
 
 <file path=ppt/slides/slide8.xml><?xml version="1.0" encoding="utf-8"?>
-<p:sld xmlns:p="http://schemas.openxmlformats.org/presentationml/2006/main" xmlns:a="http://schemas.openxmlformats.org/drawingml/2006/main" xmlns:r="http://schemas.openxmlformats.org/officeDocument/2006/relationships">
+<p:sld xmlns:a="http://schemas.openxmlformats.org/drawingml/2006/main" xmlns:r="http://schemas.openxmlformats.org/officeDocument/2006/relationships" xmlns:p="http://schemas.openxmlformats.org/presentationml/2006/main">
   <p:cSld>
     <p:bg>
       <p:bgPr>
         <a:solidFill>
           <a:srgbClr val="121723"/>
         </a:solidFill>
+        <a:effectLst/>
       </p:bgPr>
     </p:bg>
     <p:spTree>
@@ -8389,12 +8631,12 @@
       </p:grpSpPr>
       <p:sp>
         <p:nvSpPr>
-          <p:cNvPr name="Freeform 2" id="2"/>
+          <p:cNvPr id="2" name="Freeform 2"/>
           <p:cNvSpPr/>
           <p:nvPr/>
         </p:nvSpPr>
         <p:spPr>
-          <a:xfrm flipH="false" flipV="false" rot="0">
+          <a:xfrm>
             <a:off x="1063990" y="1028700"/>
             <a:ext cx="1276643" cy="968653"/>
           </a:xfrm>
@@ -8403,9 +8645,9 @@
             <a:gdLst/>
             <a:ahLst/>
             <a:cxnLst/>
-            <a:rect r="r" b="b" t="t" l="l"/>
+            <a:rect l="l" t="t" r="r" b="b"/>
             <a:pathLst>
-              <a:path h="968653" w="1276643">
+              <a:path w="1276643" h="968653">
                 <a:moveTo>
                   <a:pt x="0" y="0"/>
                 </a:moveTo>
@@ -8434,19 +8676,26 @@
               </a:extLst>
             </a:blip>
             <a:stretch>
-              <a:fillRect l="0" t="0" r="0" b="0"/>
+              <a:fillRect/>
             </a:stretch>
           </a:blipFill>
         </p:spPr>
-      </p:sp>
-      <p:sp>
-        <p:nvSpPr>
-          <p:cNvPr name="Freeform 3" id="3"/>
+        <p:txBody>
+          <a:bodyPr/>
+          <a:lstStyle/>
+          <a:p>
+            <a:endParaRPr lang="ro-MD"/>
+          </a:p>
+        </p:txBody>
+      </p:sp>
+      <p:sp>
+        <p:nvSpPr>
+          <p:cNvPr id="3" name="Freeform 3"/>
           <p:cNvSpPr/>
           <p:nvPr/>
         </p:nvSpPr>
         <p:spPr>
-          <a:xfrm flipH="true" flipV="false" rot="0">
+          <a:xfrm flipH="1">
             <a:off x="8726104" y="-2838585"/>
             <a:ext cx="7517757" cy="4886542"/>
           </a:xfrm>
@@ -8455,9 +8704,9 @@
             <a:gdLst/>
             <a:ahLst/>
             <a:cxnLst/>
-            <a:rect r="r" b="b" t="t" l="l"/>
+            <a:rect l="l" t="t" r="r" b="b"/>
             <a:pathLst>
-              <a:path h="4886542" w="7517757">
+              <a:path w="7517757" h="4886542">
                 <a:moveTo>
                   <a:pt x="7517757" y="0"/>
                 </a:moveTo>
@@ -8486,19 +8735,26 @@
               </a:extLst>
             </a:blip>
             <a:stretch>
-              <a:fillRect l="0" t="0" r="0" b="0"/>
+              <a:fillRect/>
             </a:stretch>
           </a:blipFill>
         </p:spPr>
-      </p:sp>
-      <p:sp>
-        <p:nvSpPr>
-          <p:cNvPr name="Freeform 4" id="4"/>
+        <p:txBody>
+          <a:bodyPr/>
+          <a:lstStyle/>
+          <a:p>
+            <a:endParaRPr lang="ro-MD"/>
+          </a:p>
+        </p:txBody>
+      </p:sp>
+      <p:sp>
+        <p:nvSpPr>
+          <p:cNvPr id="4" name="Freeform 4"/>
           <p:cNvSpPr/>
           <p:nvPr/>
         </p:nvSpPr>
         <p:spPr>
-          <a:xfrm flipH="true" flipV="false" rot="-5400000">
+          <a:xfrm rot="-5400000" flipH="1">
             <a:off x="15597169" y="2402483"/>
             <a:ext cx="7517757" cy="4886542"/>
           </a:xfrm>
@@ -8507,9 +8763,9 @@
             <a:gdLst/>
             <a:ahLst/>
             <a:cxnLst/>
-            <a:rect r="r" b="b" t="t" l="l"/>
+            <a:rect l="l" t="t" r="r" b="b"/>
             <a:pathLst>
-              <a:path h="4886542" w="7517757">
+              <a:path w="7517757" h="4886542">
                 <a:moveTo>
                   <a:pt x="7517757" y="0"/>
                 </a:moveTo>
@@ -8538,19 +8794,26 @@
               </a:extLst>
             </a:blip>
             <a:stretch>
-              <a:fillRect l="0" t="0" r="0" b="0"/>
+              <a:fillRect/>
             </a:stretch>
           </a:blipFill>
         </p:spPr>
+        <p:txBody>
+          <a:bodyPr/>
+          <a:lstStyle/>
+          <a:p>
+            <a:endParaRPr lang="ro-MD"/>
+          </a:p>
+        </p:txBody>
       </p:sp>
       <p:grpSp>
         <p:nvGrpSpPr>
-          <p:cNvPr name="Group 5" id="5"/>
+          <p:cNvPr id="5" name="Group 5"/>
           <p:cNvGrpSpPr/>
           <p:nvPr/>
         </p:nvGrpSpPr>
         <p:grpSpPr>
-          <a:xfrm rot="0">
+          <a:xfrm>
             <a:off x="13019365" y="-1437290"/>
             <a:ext cx="5900633" cy="5900633"/>
             <a:chOff x="0" y="0"/>
@@ -8559,12 +8822,12 @@
         </p:grpSpPr>
         <p:sp>
           <p:nvSpPr>
-            <p:cNvPr name="Freeform 6" id="6"/>
+            <p:cNvPr id="6" name="Freeform 6"/>
             <p:cNvSpPr/>
             <p:nvPr/>
           </p:nvSpPr>
           <p:spPr>
-            <a:xfrm flipH="false" flipV="false" rot="0">
+            <a:xfrm>
               <a:off x="0" y="0"/>
               <a:ext cx="812800" cy="812800"/>
             </a:xfrm>
@@ -8573,9 +8836,9 @@
               <a:gdLst/>
               <a:ahLst/>
               <a:cxnLst/>
-              <a:rect r="r" b="b" t="t" l="l"/>
+              <a:rect l="l" t="t" r="r" b="b"/>
               <a:pathLst>
-                <a:path h="812800" w="812800">
+                <a:path w="812800" h="812800">
                   <a:moveTo>
                     <a:pt x="406400" y="0"/>
                   </a:moveTo>
@@ -8606,7 +8869,7 @@
             <a:blipFill>
               <a:blip r:embed="rId6"/>
               <a:stretch>
-                <a:fillRect l="-32135" t="0" r="-20672" b="-1872"/>
+                <a:fillRect l="-32135" r="-20672" b="-1872"/>
               </a:stretch>
             </a:blipFill>
             <a:ln w="200025" cap="sq">
@@ -8617,16 +8880,23 @@
               <a:miter/>
             </a:ln>
           </p:spPr>
+          <p:txBody>
+            <a:bodyPr/>
+            <a:lstStyle/>
+            <a:p>
+              <a:endParaRPr lang="ro-MD"/>
+            </a:p>
+          </p:txBody>
         </p:sp>
       </p:grpSp>
       <p:sp>
         <p:nvSpPr>
-          <p:cNvPr name="TextBox 7" id="7"/>
-          <p:cNvSpPr txBox="true"/>
+          <p:cNvPr id="7" name="TextBox 7"/>
+          <p:cNvSpPr txBox="1"/>
           <p:nvPr/>
         </p:nvSpPr>
         <p:spPr>
-          <a:xfrm rot="0">
+          <a:xfrm>
             <a:off x="574717" y="2310541"/>
             <a:ext cx="7181301" cy="3921705"/>
           </a:xfrm>
@@ -8635,7 +8905,7 @@
           </a:prstGeom>
         </p:spPr>
         <p:txBody>
-          <a:bodyPr anchor="t" rtlCol="false" tIns="0" lIns="0" bIns="0" rIns="0">
+          <a:bodyPr lIns="0" tIns="0" rIns="0" bIns="0" rtlCol="0" anchor="t">
             <a:spAutoFit/>
           </a:bodyPr>
           <a:lstStyle/>
@@ -8700,13 +8970,13 @@
       </p:sp>
       <p:sp>
         <p:nvSpPr>
-          <p:cNvPr name="TextBox 8" id="8"/>
-          <p:cNvSpPr txBox="true"/>
+          <p:cNvPr id="8" name="TextBox 8"/>
+          <p:cNvSpPr txBox="1"/>
           <p:nvPr/>
         </p:nvSpPr>
         <p:spPr>
-          <a:xfrm rot="0">
-            <a:off x="7284272" y="4933216"/>
+          <a:xfrm>
+            <a:off x="7284272" y="4448440"/>
             <a:ext cx="3389143" cy="449142"/>
           </a:xfrm>
           <a:prstGeom prst="rect">
@@ -8714,7 +8984,7 @@
           </a:prstGeom>
         </p:spPr>
         <p:txBody>
-          <a:bodyPr anchor="t" rtlCol="false" tIns="0" lIns="0" bIns="0" rIns="0">
+          <a:bodyPr lIns="0" tIns="0" rIns="0" bIns="0" rtlCol="0" anchor="t">
             <a:spAutoFit/>
           </a:bodyPr>
           <a:lstStyle/>
@@ -8725,7 +8995,7 @@
               </a:lnSpc>
             </a:pPr>
             <a:r>
-              <a:rPr lang="en-US" sz="3123" b="true">
+              <a:rPr lang="en-US" sz="3123" b="1" dirty="0">
                 <a:solidFill>
                   <a:srgbClr val="E7FF2F"/>
                 </a:solidFill>
@@ -8734,19 +9004,43 @@
                 <a:cs typeface="Neue Montreal Medium"/>
                 <a:sym typeface="Neue Montreal Medium"/>
               </a:rPr>
-              <a:t>Cum funcționează?</a:t>
-            </a:r>
-          </a:p>
-        </p:txBody>
-      </p:sp>
-      <p:sp>
-        <p:nvSpPr>
-          <p:cNvPr name="TextBox 9" id="9"/>
-          <p:cNvSpPr txBox="true"/>
+              <a:t>Cum </a:t>
+            </a:r>
+            <a:r>
+              <a:rPr lang="en-US" sz="3123" b="1" dirty="0" err="1">
+                <a:solidFill>
+                  <a:srgbClr val="E7FF2F"/>
+                </a:solidFill>
+                <a:latin typeface="Neue Montreal Medium"/>
+                <a:ea typeface="Neue Montreal Medium"/>
+                <a:cs typeface="Neue Montreal Medium"/>
+                <a:sym typeface="Neue Montreal Medium"/>
+              </a:rPr>
+              <a:t>funcționează</a:t>
+            </a:r>
+            <a:r>
+              <a:rPr lang="en-US" sz="3123" b="1" dirty="0">
+                <a:solidFill>
+                  <a:srgbClr val="E7FF2F"/>
+                </a:solidFill>
+                <a:latin typeface="Neue Montreal Medium"/>
+                <a:ea typeface="Neue Montreal Medium"/>
+                <a:cs typeface="Neue Montreal Medium"/>
+                <a:sym typeface="Neue Montreal Medium"/>
+              </a:rPr>
+              <a:t>?</a:t>
+            </a:r>
+          </a:p>
+        </p:txBody>
+      </p:sp>
+      <p:sp>
+        <p:nvSpPr>
+          <p:cNvPr id="9" name="TextBox 9"/>
+          <p:cNvSpPr txBox="1"/>
           <p:nvPr/>
         </p:nvSpPr>
         <p:spPr>
-          <a:xfrm rot="0">
+          <a:xfrm>
             <a:off x="7284272" y="5365750"/>
             <a:ext cx="7510976" cy="4921250"/>
           </a:xfrm>
@@ -8755,7 +9049,7 @@
           </a:prstGeom>
         </p:spPr>
         <p:txBody>
-          <a:bodyPr anchor="t" rtlCol="false" tIns="0" lIns="0" bIns="0" rIns="0">
+          <a:bodyPr lIns="0" tIns="0" rIns="0" bIns="0" rtlCol="0" anchor="t">
             <a:spAutoFit/>
           </a:bodyPr>
           <a:lstStyle/>
@@ -8779,11 +9073,11 @@
             </a:r>
           </a:p>
           <a:p>
-            <a:pPr algn="l" marL="431799" indent="-215899" lvl="1">
+            <a:pPr marL="431799" lvl="1" indent="-215899" algn="l">
               <a:lnSpc>
                 <a:spcPts val="2799"/>
               </a:lnSpc>
-              <a:buAutoNum type="arabicPeriod" startAt="1"/>
+              <a:buAutoNum type="arabicPeriod"/>
             </a:pPr>
             <a:r>
               <a:rPr lang="en-US" sz="1999">
@@ -8799,11 +9093,11 @@
             </a:r>
           </a:p>
           <a:p>
-            <a:pPr algn="l" marL="431799" indent="-215899" lvl="1">
+            <a:pPr marL="431799" lvl="1" indent="-215899" algn="l">
               <a:lnSpc>
                 <a:spcPts val="2799"/>
               </a:lnSpc>
-              <a:buAutoNum type="arabicPeriod" startAt="1"/>
+              <a:buAutoNum type="arabicPeriod"/>
             </a:pPr>
             <a:r>
               <a:rPr lang="en-US" sz="1999">
@@ -8819,11 +9113,11 @@
             </a:r>
           </a:p>
           <a:p>
-            <a:pPr algn="l" marL="431799" indent="-215899" lvl="1">
+            <a:pPr marL="431799" lvl="1" indent="-215899" algn="l">
               <a:lnSpc>
                 <a:spcPts val="2799"/>
               </a:lnSpc>
-              <a:buAutoNum type="arabicPeriod" startAt="1"/>
+              <a:buAutoNum type="arabicPeriod"/>
             </a:pPr>
             <a:r>
               <a:rPr lang="en-US" sz="1999">
@@ -8839,11 +9133,11 @@
             </a:r>
           </a:p>
           <a:p>
-            <a:pPr algn="l" marL="431799" indent="-215899" lvl="1">
+            <a:pPr marL="431799" lvl="1" indent="-215899" algn="l">
               <a:lnSpc>
                 <a:spcPts val="2799"/>
               </a:lnSpc>
-              <a:buAutoNum type="arabicPeriod" startAt="1"/>
+              <a:buAutoNum type="arabicPeriod"/>
             </a:pPr>
             <a:r>
               <a:rPr lang="en-US" sz="1999">
@@ -8859,11 +9153,11 @@
             </a:r>
           </a:p>
           <a:p>
-            <a:pPr algn="l" marL="431799" indent="-215899" lvl="1">
+            <a:pPr marL="431799" lvl="1" indent="-215899" algn="l">
               <a:lnSpc>
                 <a:spcPts val="2799"/>
               </a:lnSpc>
-              <a:buAutoNum type="arabicPeriod" startAt="1"/>
+              <a:buAutoNum type="arabicPeriod"/>
             </a:pPr>
             <a:r>
               <a:rPr lang="en-US" sz="1999">
@@ -8879,11 +9173,11 @@
             </a:r>
           </a:p>
           <a:p>
-            <a:pPr algn="l" marL="431799" indent="-215899" lvl="1">
+            <a:pPr marL="431799" lvl="1" indent="-215899" algn="l">
               <a:lnSpc>
                 <a:spcPts val="2799"/>
               </a:lnSpc>
-              <a:buAutoNum type="arabicPeriod" startAt="1"/>
+              <a:buAutoNum type="arabicPeriod"/>
             </a:pPr>
             <a:r>
               <a:rPr lang="en-US" sz="1999">
@@ -8899,11 +9193,11 @@
             </a:r>
           </a:p>
           <a:p>
-            <a:pPr algn="l" marL="431799" indent="-215899" lvl="1">
+            <a:pPr marL="431799" lvl="1" indent="-215899" algn="l">
               <a:lnSpc>
                 <a:spcPts val="2799"/>
               </a:lnSpc>
-              <a:buAutoNum type="arabicPeriod" startAt="1"/>
+              <a:buAutoNum type="arabicPeriod"/>
             </a:pPr>
             <a:r>
               <a:rPr lang="en-US" sz="1999">
@@ -8943,6 +9237,15 @@
                 <a:spcPts val="2799"/>
               </a:lnSpc>
             </a:pPr>
+            <a:endParaRPr lang="en-US" sz="1999">
+              <a:solidFill>
+                <a:srgbClr val="FFFFFF"/>
+              </a:solidFill>
+              <a:latin typeface="Neue Montreal"/>
+              <a:ea typeface="Neue Montreal"/>
+              <a:cs typeface="Neue Montreal"/>
+              <a:sym typeface="Neue Montreal"/>
+            </a:endParaRPr>
           </a:p>
         </p:txBody>
       </p:sp>
@@ -8951,20 +9254,21 @@
   <p:clrMapOvr>
     <a:masterClrMapping/>
   </p:clrMapOvr>
-  <p:transition spd="fast">
-    <p:wipe dir="l"/>
+  <p:transition>
+    <p:wipe/>
   </p:transition>
 </p:sld>
 </file>
 
 <file path=ppt/slides/slide9.xml><?xml version="1.0" encoding="utf-8"?>
-<p:sld xmlns:p="http://schemas.openxmlformats.org/presentationml/2006/main" xmlns:a="http://schemas.openxmlformats.org/drawingml/2006/main" xmlns:r="http://schemas.openxmlformats.org/officeDocument/2006/relationships">
+<p:sld xmlns:a="http://schemas.openxmlformats.org/drawingml/2006/main" xmlns:r="http://schemas.openxmlformats.org/officeDocument/2006/relationships" xmlns:p="http://schemas.openxmlformats.org/presentationml/2006/main">
   <p:cSld>
     <p:bg>
       <p:bgPr>
         <a:solidFill>
           <a:srgbClr val="121723"/>
         </a:solidFill>
+        <a:effectLst/>
       </p:bgPr>
     </p:bg>
     <p:spTree>
@@ -8983,12 +9287,12 @@
       </p:grpSpPr>
       <p:sp>
         <p:nvSpPr>
-          <p:cNvPr name="Freeform 2" id="2"/>
+          <p:cNvPr id="2" name="Freeform 2"/>
           <p:cNvSpPr/>
           <p:nvPr/>
         </p:nvSpPr>
         <p:spPr>
-          <a:xfrm flipH="true" flipV="false" rot="0">
+          <a:xfrm flipH="1">
             <a:off x="9370565" y="-1501280"/>
             <a:ext cx="7030467" cy="4587380"/>
           </a:xfrm>
@@ -8997,9 +9301,9 @@
             <a:gdLst/>
             <a:ahLst/>
             <a:cxnLst/>
-            <a:rect r="r" b="b" t="t" l="l"/>
+            <a:rect l="l" t="t" r="r" b="b"/>
             <a:pathLst>
-              <a:path h="4587380" w="7030467">
+              <a:path w="7030467" h="4587380">
                 <a:moveTo>
                   <a:pt x="7030467" y="0"/>
                 </a:moveTo>
@@ -9028,19 +9332,26 @@
               </a:extLst>
             </a:blip>
             <a:stretch>
-              <a:fillRect l="0" t="0" r="0" b="0"/>
+              <a:fillRect/>
             </a:stretch>
           </a:blipFill>
         </p:spPr>
+        <p:txBody>
+          <a:bodyPr/>
+          <a:lstStyle/>
+          <a:p>
+            <a:endParaRPr lang="ro-MD"/>
+          </a:p>
+        </p:txBody>
       </p:sp>
       <p:grpSp>
         <p:nvGrpSpPr>
-          <p:cNvPr name="Group 3" id="3"/>
+          <p:cNvPr id="3" name="Group 3"/>
           <p:cNvGrpSpPr/>
           <p:nvPr/>
         </p:nvGrpSpPr>
         <p:grpSpPr>
-          <a:xfrm rot="0">
+          <a:xfrm>
             <a:off x="11979609" y="0"/>
             <a:ext cx="6308391" cy="10287000"/>
             <a:chOff x="0" y="0"/>
@@ -9049,21 +9360,21 @@
         </p:grpSpPr>
         <p:pic>
           <p:nvPicPr>
-            <p:cNvPr name="Picture 4" id="4"/>
+            <p:cNvPr id="4" name="Picture 4"/>
             <p:cNvPicPr>
-              <a:picLocks noChangeAspect="true"/>
+              <a:picLocks noChangeAspect="1"/>
             </p:cNvPicPr>
             <p:nvPr/>
           </p:nvPicPr>
           <p:blipFill>
             <a:blip r:embed="rId4"/>
-            <a:srcRect l="10114" t="2161" r="0" b="0"/>
+            <a:srcRect l="10114" t="2161"/>
             <a:stretch>
               <a:fillRect/>
             </a:stretch>
           </p:blipFill>
           <p:spPr>
-            <a:xfrm flipH="false" flipV="false">
+            <a:xfrm>
               <a:off x="0" y="0"/>
               <a:ext cx="8411188" cy="13716000"/>
             </a:xfrm>
@@ -9075,12 +9386,12 @@
       </p:grpSp>
       <p:sp>
         <p:nvSpPr>
-          <p:cNvPr name="Freeform 5" id="5"/>
+          <p:cNvPr id="5" name="Freeform 5"/>
           <p:cNvSpPr/>
           <p:nvPr/>
         </p:nvSpPr>
         <p:spPr>
-          <a:xfrm flipH="false" flipV="false" rot="0">
+          <a:xfrm>
             <a:off x="1063990" y="1028700"/>
             <a:ext cx="1276643" cy="968653"/>
           </a:xfrm>
@@ -9089,9 +9400,9 @@
             <a:gdLst/>
             <a:ahLst/>
             <a:cxnLst/>
-            <a:rect r="r" b="b" t="t" l="l"/>
+            <a:rect l="l" t="t" r="r" b="b"/>
             <a:pathLst>
-              <a:path h="968653" w="1276643">
+              <a:path w="1276643" h="968653">
                 <a:moveTo>
                   <a:pt x="0" y="0"/>
                 </a:moveTo>
@@ -9120,19 +9431,26 @@
               </a:extLst>
             </a:blip>
             <a:stretch>
-              <a:fillRect l="0" t="0" r="0" b="0"/>
+              <a:fillRect/>
             </a:stretch>
           </a:blipFill>
         </p:spPr>
+        <p:txBody>
+          <a:bodyPr/>
+          <a:lstStyle/>
+          <a:p>
+            <a:endParaRPr lang="ro-MD"/>
+          </a:p>
+        </p:txBody>
       </p:sp>
       <p:grpSp>
         <p:nvGrpSpPr>
-          <p:cNvPr name="Group 6" id="6"/>
+          <p:cNvPr id="6" name="Group 6"/>
           <p:cNvGrpSpPr/>
           <p:nvPr/>
         </p:nvGrpSpPr>
         <p:grpSpPr>
-          <a:xfrm rot="0">
+          <a:xfrm>
             <a:off x="10517813" y="5473315"/>
             <a:ext cx="704803" cy="704803"/>
             <a:chOff x="0" y="0"/>
@@ -9141,12 +9459,12 @@
         </p:grpSpPr>
         <p:sp>
           <p:nvSpPr>
-            <p:cNvPr name="Freeform 7" id="7"/>
+            <p:cNvPr id="7" name="Freeform 7"/>
             <p:cNvSpPr/>
             <p:nvPr/>
           </p:nvSpPr>
           <p:spPr>
-            <a:xfrm flipH="false" flipV="false" rot="0">
+            <a:xfrm>
               <a:off x="0" y="0"/>
               <a:ext cx="812800" cy="812800"/>
             </a:xfrm>
@@ -9155,9 +9473,9 @@
               <a:gdLst/>
               <a:ahLst/>
               <a:cxnLst/>
-              <a:rect r="r" b="b" t="t" l="l"/>
+              <a:rect l="l" t="t" r="r" b="b"/>
               <a:pathLst>
-                <a:path h="812800" w="812800">
+                <a:path w="812800" h="812800">
                   <a:moveTo>
                     <a:pt x="406400" y="0"/>
                   </a:moveTo>
@@ -9189,11 +9507,18 @@
               <a:srgbClr val="FFFFFF"/>
             </a:solidFill>
           </p:spPr>
+          <p:txBody>
+            <a:bodyPr/>
+            <a:lstStyle/>
+            <a:p>
+              <a:endParaRPr lang="ro-MD"/>
+            </a:p>
+          </p:txBody>
         </p:sp>
         <p:sp>
           <p:nvSpPr>
-            <p:cNvPr name="TextBox 8" id="8"/>
-            <p:cNvSpPr txBox="true"/>
+            <p:cNvPr id="8" name="TextBox 8"/>
+            <p:cNvSpPr txBox="1"/>
             <p:nvPr/>
           </p:nvSpPr>
           <p:spPr>
@@ -9206,7 +9531,7 @@
             </a:prstGeom>
           </p:spPr>
           <p:txBody>
-            <a:bodyPr anchor="ctr" rtlCol="false" tIns="50800" lIns="50800" bIns="50800" rIns="50800"/>
+            <a:bodyPr lIns="50800" tIns="50800" rIns="50800" bIns="50800" rtlCol="0" anchor="ctr"/>
             <a:lstStyle/>
             <a:p>
               <a:pPr algn="ctr">
@@ -9214,18 +9539,19 @@
                   <a:spcPts val="2659"/>
                 </a:lnSpc>
               </a:pPr>
+              <a:endParaRPr/>
             </a:p>
           </p:txBody>
         </p:sp>
       </p:grpSp>
       <p:grpSp>
         <p:nvGrpSpPr>
-          <p:cNvPr name="Group 9" id="9"/>
+          <p:cNvPr id="9" name="Group 9"/>
           <p:cNvGrpSpPr/>
           <p:nvPr/>
         </p:nvGrpSpPr>
         <p:grpSpPr>
-          <a:xfrm rot="0">
+          <a:xfrm>
             <a:off x="10517813" y="6620245"/>
             <a:ext cx="704803" cy="704803"/>
             <a:chOff x="0" y="0"/>
@@ -9234,12 +9560,12 @@
         </p:grpSpPr>
         <p:sp>
           <p:nvSpPr>
-            <p:cNvPr name="Freeform 10" id="10"/>
+            <p:cNvPr id="10" name="Freeform 10"/>
             <p:cNvSpPr/>
             <p:nvPr/>
           </p:nvSpPr>
           <p:spPr>
-            <a:xfrm flipH="false" flipV="false" rot="0">
+            <a:xfrm>
               <a:off x="0" y="0"/>
               <a:ext cx="812800" cy="812800"/>
             </a:xfrm>
@@ -9248,9 +9574,9 @@
               <a:gdLst/>
               <a:ahLst/>
               <a:cxnLst/>
-              <a:rect r="r" b="b" t="t" l="l"/>
+              <a:rect l="l" t="t" r="r" b="b"/>
               <a:pathLst>
-                <a:path h="812800" w="812800">
+                <a:path w="812800" h="812800">
                   <a:moveTo>
                     <a:pt x="406400" y="0"/>
                   </a:moveTo>
@@ -9282,11 +9608,18 @@
               <a:srgbClr val="FFFFFF"/>
             </a:solidFill>
           </p:spPr>
+          <p:txBody>
+            <a:bodyPr/>
+            <a:lstStyle/>
+            <a:p>
+              <a:endParaRPr lang="ro-MD"/>
+            </a:p>
+          </p:txBody>
         </p:sp>
         <p:sp>
           <p:nvSpPr>
-            <p:cNvPr name="TextBox 11" id="11"/>
-            <p:cNvSpPr txBox="true"/>
+            <p:cNvPr id="11" name="TextBox 11"/>
+            <p:cNvSpPr txBox="1"/>
             <p:nvPr/>
           </p:nvSpPr>
           <p:spPr>
@@ -9299,7 +9632,7 @@
             </a:prstGeom>
           </p:spPr>
           <p:txBody>
-            <a:bodyPr anchor="ctr" rtlCol="false" tIns="50800" lIns="50800" bIns="50800" rIns="50800"/>
+            <a:bodyPr lIns="50800" tIns="50800" rIns="50800" bIns="50800" rtlCol="0" anchor="ctr"/>
             <a:lstStyle/>
             <a:p>
               <a:pPr algn="ctr">
@@ -9307,18 +9640,19 @@
                   <a:spcPts val="2659"/>
                 </a:lnSpc>
               </a:pPr>
+              <a:endParaRPr/>
             </a:p>
           </p:txBody>
         </p:sp>
       </p:grpSp>
       <p:sp>
         <p:nvSpPr>
-          <p:cNvPr name="Freeform 12" id="12"/>
+          <p:cNvPr id="12" name="Freeform 12"/>
           <p:cNvSpPr/>
           <p:nvPr/>
         </p:nvSpPr>
         <p:spPr>
-          <a:xfrm flipH="false" flipV="false" rot="0">
+          <a:xfrm>
             <a:off x="10484863" y="5440364"/>
             <a:ext cx="770704" cy="770704"/>
           </a:xfrm>
@@ -9327,9 +9661,9 @@
             <a:gdLst/>
             <a:ahLst/>
             <a:cxnLst/>
-            <a:rect r="r" b="b" t="t" l="l"/>
+            <a:rect l="l" t="t" r="r" b="b"/>
             <a:pathLst>
-              <a:path h="770704" w="770704">
+              <a:path w="770704" h="770704">
                 <a:moveTo>
                   <a:pt x="0" y="0"/>
                 </a:moveTo>
@@ -9358,19 +9692,26 @@
               </a:extLst>
             </a:blip>
             <a:stretch>
-              <a:fillRect l="0" t="0" r="0" b="0"/>
+              <a:fillRect/>
             </a:stretch>
           </a:blipFill>
         </p:spPr>
+        <p:txBody>
+          <a:bodyPr/>
+          <a:lstStyle/>
+          <a:p>
+            <a:endParaRPr lang="ro-MD"/>
+          </a:p>
+        </p:txBody>
       </p:sp>
       <p:grpSp>
         <p:nvGrpSpPr>
-          <p:cNvPr name="Group 13" id="13"/>
+          <p:cNvPr id="13" name="Group 13"/>
           <p:cNvGrpSpPr/>
           <p:nvPr/>
         </p:nvGrpSpPr>
         <p:grpSpPr>
-          <a:xfrm rot="0">
+          <a:xfrm>
             <a:off x="10517813" y="7767176"/>
             <a:ext cx="704803" cy="704803"/>
             <a:chOff x="0" y="0"/>
@@ -9379,12 +9720,12 @@
         </p:grpSpPr>
         <p:sp>
           <p:nvSpPr>
-            <p:cNvPr name="Freeform 14" id="14"/>
+            <p:cNvPr id="14" name="Freeform 14"/>
             <p:cNvSpPr/>
             <p:nvPr/>
           </p:nvSpPr>
           <p:spPr>
-            <a:xfrm flipH="false" flipV="false" rot="0">
+            <a:xfrm>
               <a:off x="0" y="0"/>
               <a:ext cx="812800" cy="812800"/>
             </a:xfrm>
@@ -9393,9 +9734,9 @@
               <a:gdLst/>
               <a:ahLst/>
               <a:cxnLst/>
-              <a:rect r="r" b="b" t="t" l="l"/>
+              <a:rect l="l" t="t" r="r" b="b"/>
               <a:pathLst>
-                <a:path h="812800" w="812800">
+                <a:path w="812800" h="812800">
                   <a:moveTo>
                     <a:pt x="406400" y="0"/>
                   </a:moveTo>
@@ -9427,11 +9768,18 @@
               <a:srgbClr val="FFFFFF"/>
             </a:solidFill>
           </p:spPr>
+          <p:txBody>
+            <a:bodyPr/>
+            <a:lstStyle/>
+            <a:p>
+              <a:endParaRPr lang="ro-MD"/>
+            </a:p>
+          </p:txBody>
         </p:sp>
         <p:sp>
           <p:nvSpPr>
-            <p:cNvPr name="TextBox 15" id="15"/>
-            <p:cNvSpPr txBox="true"/>
+            <p:cNvPr id="15" name="TextBox 15"/>
+            <p:cNvSpPr txBox="1"/>
             <p:nvPr/>
           </p:nvSpPr>
           <p:spPr>
@@ -9444,7 +9792,7 @@
             </a:prstGeom>
           </p:spPr>
           <p:txBody>
-            <a:bodyPr anchor="ctr" rtlCol="false" tIns="50800" lIns="50800" bIns="50800" rIns="50800"/>
+            <a:bodyPr lIns="50800" tIns="50800" rIns="50800" bIns="50800" rtlCol="0" anchor="ctr"/>
             <a:lstStyle/>
             <a:p>
               <a:pPr algn="ctr">
@@ -9452,18 +9800,19 @@
                   <a:spcPts val="2659"/>
                 </a:lnSpc>
               </a:pPr>
+              <a:endParaRPr/>
             </a:p>
           </p:txBody>
         </p:sp>
       </p:grpSp>
       <p:sp>
         <p:nvSpPr>
-          <p:cNvPr name="Freeform 16" id="16"/>
+          <p:cNvPr id="16" name="Freeform 16"/>
           <p:cNvSpPr/>
           <p:nvPr/>
         </p:nvSpPr>
         <p:spPr>
-          <a:xfrm flipH="false" flipV="false" rot="0">
+          <a:xfrm>
             <a:off x="10484863" y="7745849"/>
             <a:ext cx="770704" cy="770704"/>
           </a:xfrm>
@@ -9472,9 +9821,9 @@
             <a:gdLst/>
             <a:ahLst/>
             <a:cxnLst/>
-            <a:rect r="r" b="b" t="t" l="l"/>
+            <a:rect l="l" t="t" r="r" b="b"/>
             <a:pathLst>
-              <a:path h="770704" w="770704">
+              <a:path w="770704" h="770704">
                 <a:moveTo>
                   <a:pt x="0" y="0"/>
                 </a:moveTo>
@@ -9503,19 +9852,26 @@
               </a:extLst>
             </a:blip>
             <a:stretch>
-              <a:fillRect l="0" t="0" r="0" b="0"/>
+              <a:fillRect/>
             </a:stretch>
           </a:blipFill>
         </p:spPr>
-      </p:sp>
-      <p:sp>
-        <p:nvSpPr>
-          <p:cNvPr name="Freeform 17" id="17"/>
+        <p:txBody>
+          <a:bodyPr/>
+          <a:lstStyle/>
+          <a:p>
+            <a:endParaRPr lang="ro-MD"/>
+          </a:p>
+        </p:txBody>
+      </p:sp>
+      <p:sp>
+        <p:nvSpPr>
+          <p:cNvPr id="17" name="Freeform 17"/>
           <p:cNvSpPr/>
           <p:nvPr/>
         </p:nvSpPr>
         <p:spPr>
-          <a:xfrm flipH="false" flipV="false" rot="0">
+          <a:xfrm>
             <a:off x="10484863" y="6587295"/>
             <a:ext cx="770704" cy="770704"/>
           </a:xfrm>
@@ -9524,9 +9880,9 @@
             <a:gdLst/>
             <a:ahLst/>
             <a:cxnLst/>
-            <a:rect r="r" b="b" t="t" l="l"/>
+            <a:rect l="l" t="t" r="r" b="b"/>
             <a:pathLst>
-              <a:path h="770704" w="770704">
+              <a:path w="770704" h="770704">
                 <a:moveTo>
                   <a:pt x="0" y="0"/>
                 </a:moveTo>
@@ -9555,19 +9911,26 @@
               </a:extLst>
             </a:blip>
             <a:stretch>
-              <a:fillRect l="0" t="0" r="0" b="0"/>
+              <a:fillRect/>
             </a:stretch>
           </a:blipFill>
         </p:spPr>
+        <p:txBody>
+          <a:bodyPr/>
+          <a:lstStyle/>
+          <a:p>
+            <a:endParaRPr lang="ro-MD"/>
+          </a:p>
+        </p:txBody>
       </p:sp>
       <p:grpSp>
         <p:nvGrpSpPr>
-          <p:cNvPr name="Group 18" id="18"/>
+          <p:cNvPr id="18" name="Group 18"/>
           <p:cNvGrpSpPr/>
           <p:nvPr/>
         </p:nvGrpSpPr>
         <p:grpSpPr>
-          <a:xfrm rot="0">
+          <a:xfrm>
             <a:off x="944797" y="2686152"/>
             <a:ext cx="5417305" cy="1621286"/>
             <a:chOff x="0" y="0"/>
@@ -9576,12 +9939,12 @@
         </p:grpSpPr>
         <p:sp>
           <p:nvSpPr>
-            <p:cNvPr name="Freeform 19" id="19"/>
+            <p:cNvPr id="19" name="Freeform 19"/>
             <p:cNvSpPr/>
             <p:nvPr/>
           </p:nvSpPr>
           <p:spPr>
-            <a:xfrm flipH="false" flipV="false" rot="0">
+            <a:xfrm>
               <a:off x="0" y="0"/>
               <a:ext cx="1464929" cy="438423"/>
             </a:xfrm>
@@ -9590,9 +9953,9 @@
               <a:gdLst/>
               <a:ahLst/>
               <a:cxnLst/>
-              <a:rect r="r" b="b" t="t" l="l"/>
+              <a:rect l="l" t="t" r="r" b="b"/>
               <a:pathLst>
-                <a:path h="438423" w="1464929">
+                <a:path w="1464929" h="438423">
                   <a:moveTo>
                     <a:pt x="72885" y="0"/>
                   </a:moveTo>
@@ -9641,11 +10004,18 @@
               <a:srgbClr val="FFFFFF"/>
             </a:solidFill>
           </p:spPr>
+          <p:txBody>
+            <a:bodyPr/>
+            <a:lstStyle/>
+            <a:p>
+              <a:endParaRPr lang="ro-MD"/>
+            </a:p>
+          </p:txBody>
         </p:sp>
         <p:sp>
           <p:nvSpPr>
-            <p:cNvPr name="TextBox 20" id="20"/>
-            <p:cNvSpPr txBox="true"/>
+            <p:cNvPr id="20" name="TextBox 20"/>
+            <p:cNvSpPr txBox="1"/>
             <p:nvPr/>
           </p:nvSpPr>
           <p:spPr>
@@ -9658,7 +10028,7 @@
             </a:prstGeom>
           </p:spPr>
           <p:txBody>
-            <a:bodyPr anchor="ctr" rtlCol="false" tIns="50800" lIns="50800" bIns="50800" rIns="50800"/>
+            <a:bodyPr lIns="50800" tIns="50800" rIns="50800" bIns="50800" rtlCol="0" anchor="ctr"/>
             <a:lstStyle/>
             <a:p>
               <a:pPr algn="ctr">
@@ -9666,18 +10036,19 @@
                   <a:spcPts val="2598"/>
                 </a:lnSpc>
               </a:pPr>
+              <a:endParaRPr/>
             </a:p>
           </p:txBody>
         </p:sp>
       </p:grpSp>
       <p:sp>
         <p:nvSpPr>
-          <p:cNvPr name="TextBox 21" id="21"/>
-          <p:cNvSpPr txBox="true"/>
+          <p:cNvPr id="21" name="TextBox 21"/>
+          <p:cNvSpPr txBox="1"/>
           <p:nvPr/>
         </p:nvSpPr>
         <p:spPr>
-          <a:xfrm rot="0">
+          <a:xfrm>
             <a:off x="1119204" y="2638527"/>
             <a:ext cx="5242898" cy="1492250"/>
           </a:xfrm>
@@ -9686,7 +10057,7 @@
           </a:prstGeom>
         </p:spPr>
         <p:txBody>
-          <a:bodyPr anchor="t" rtlCol="false" tIns="0" lIns="0" bIns="0" rIns="0">
+          <a:bodyPr lIns="0" tIns="0" rIns="0" bIns="0" rtlCol="0" anchor="t">
             <a:spAutoFit/>
           </a:bodyPr>
           <a:lstStyle/>
@@ -9713,12 +10084,12 @@
       </p:sp>
       <p:grpSp>
         <p:nvGrpSpPr>
-          <p:cNvPr name="Group 22" id="22"/>
+          <p:cNvPr id="22" name="Group 22"/>
           <p:cNvGrpSpPr/>
           <p:nvPr/>
         </p:nvGrpSpPr>
         <p:grpSpPr>
-          <a:xfrm rot="0">
+          <a:xfrm>
             <a:off x="774855" y="4178623"/>
             <a:ext cx="9609161" cy="5933255"/>
             <a:chOff x="0" y="0"/>
@@ -9727,12 +10098,12 @@
         </p:grpSpPr>
         <p:sp>
           <p:nvSpPr>
-            <p:cNvPr name="Freeform 23" id="23"/>
+            <p:cNvPr id="23" name="Freeform 23"/>
             <p:cNvSpPr/>
             <p:nvPr/>
           </p:nvSpPr>
           <p:spPr>
-            <a:xfrm flipH="false" flipV="false" rot="0">
+            <a:xfrm>
               <a:off x="0" y="0"/>
               <a:ext cx="2598476" cy="1604450"/>
             </a:xfrm>
@@ -9741,9 +10112,9 @@
               <a:gdLst/>
               <a:ahLst/>
               <a:cxnLst/>
-              <a:rect r="r" b="b" t="t" l="l"/>
+              <a:rect l="l" t="t" r="r" b="b"/>
               <a:pathLst>
-                <a:path h="1604450" w="2598476">
+                <a:path w="2598476" h="1604450">
                   <a:moveTo>
                     <a:pt x="41090" y="0"/>
                   </a:moveTo>
@@ -9802,11 +10173,18 @@
               <a:srgbClr val="FFFFFF"/>
             </a:solidFill>
           </p:spPr>
+          <p:txBody>
+            <a:bodyPr/>
+            <a:lstStyle/>
+            <a:p>
+              <a:endParaRPr lang="ro-MD"/>
+            </a:p>
+          </p:txBody>
         </p:sp>
         <p:sp>
           <p:nvSpPr>
-            <p:cNvPr name="TextBox 24" id="24"/>
-            <p:cNvSpPr txBox="true"/>
+            <p:cNvPr id="24" name="TextBox 24"/>
+            <p:cNvSpPr txBox="1"/>
             <p:nvPr/>
           </p:nvSpPr>
           <p:spPr>
@@ -9819,7 +10197,7 @@
             </a:prstGeom>
           </p:spPr>
           <p:txBody>
-            <a:bodyPr anchor="ctr" rtlCol="false" tIns="50800" lIns="50800" bIns="50800" rIns="50800"/>
+            <a:bodyPr lIns="50800" tIns="50800" rIns="50800" bIns="50800" rtlCol="0" anchor="ctr"/>
             <a:lstStyle/>
             <a:p>
               <a:pPr algn="ctr">
@@ -9827,18 +10205,19 @@
                   <a:spcPts val="2598"/>
                 </a:lnSpc>
               </a:pPr>
+              <a:endParaRPr/>
             </a:p>
           </p:txBody>
         </p:sp>
       </p:grpSp>
       <p:sp>
         <p:nvSpPr>
-          <p:cNvPr name="TextBox 25" id="25"/>
-          <p:cNvSpPr txBox="true"/>
+          <p:cNvPr id="25" name="TextBox 25"/>
+          <p:cNvSpPr txBox="1"/>
           <p:nvPr/>
         </p:nvSpPr>
         <p:spPr>
-          <a:xfrm rot="0">
+          <a:xfrm>
             <a:off x="1334753" y="4354500"/>
             <a:ext cx="8489365" cy="5902995"/>
           </a:xfrm>
@@ -9847,7 +10226,7 @@
           </a:prstGeom>
         </p:spPr>
         <p:txBody>
-          <a:bodyPr anchor="t" rtlCol="false" tIns="0" lIns="0" bIns="0" rIns="0">
+          <a:bodyPr lIns="0" tIns="0" rIns="0" bIns="0" rtlCol="0" anchor="t">
             <a:spAutoFit/>
           </a:bodyPr>
           <a:lstStyle/>
@@ -9876,6 +10255,15 @@
                 <a:spcPts val="2609"/>
               </a:lnSpc>
             </a:pPr>
+            <a:endParaRPr lang="en-US" sz="1863">
+              <a:solidFill>
+                <a:srgbClr val="181718"/>
+              </a:solidFill>
+              <a:latin typeface="Neue Montreal"/>
+              <a:ea typeface="Neue Montreal"/>
+              <a:cs typeface="Neue Montreal"/>
+              <a:sym typeface="Neue Montreal"/>
+            </a:endParaRPr>
           </a:p>
           <a:p>
             <a:pPr algn="l">
@@ -9902,6 +10290,15 @@
                 <a:spcPts val="2609"/>
               </a:lnSpc>
             </a:pPr>
+            <a:endParaRPr lang="en-US" sz="1863">
+              <a:solidFill>
+                <a:srgbClr val="181718"/>
+              </a:solidFill>
+              <a:latin typeface="Neue Montreal"/>
+              <a:ea typeface="Neue Montreal"/>
+              <a:cs typeface="Neue Montreal"/>
+              <a:sym typeface="Neue Montreal"/>
+            </a:endParaRPr>
           </a:p>
           <a:p>
             <a:pPr algn="l">
@@ -9928,6 +10325,15 @@
                 <a:spcPts val="2609"/>
               </a:lnSpc>
             </a:pPr>
+            <a:endParaRPr lang="en-US" sz="1863">
+              <a:solidFill>
+                <a:srgbClr val="181718"/>
+              </a:solidFill>
+              <a:latin typeface="Neue Montreal"/>
+              <a:ea typeface="Neue Montreal"/>
+              <a:cs typeface="Neue Montreal"/>
+              <a:sym typeface="Neue Montreal"/>
+            </a:endParaRPr>
           </a:p>
         </p:txBody>
       </p:sp>
@@ -9936,8 +10342,8 @@
   <p:clrMapOvr>
     <a:masterClrMapping/>
   </p:clrMapOvr>
-  <p:transition spd="fast">
-    <p:wipe dir="l"/>
+  <p:transition>
+    <p:wipe/>
   </p:transition>
 </p:sld>
 </file>

--- a/Prezentare.pptx
+++ b/Prezentare.pptx
@@ -334,7 +334,7 @@
             <a:fld id="{1D8BD707-D9CF-40AE-B4C6-C98DA3205C09}" type="datetimeFigureOut">
               <a:rPr lang="en-US" smtClean="0"/>
               <a:pPr/>
-              <a:t>5/27/2025</a:t>
+              <a:t>5/28/2025</a:t>
             </a:fld>
             <a:endParaRPr lang="en-US"/>
           </a:p>
@@ -499,7 +499,7 @@
             <a:fld id="{1D8BD707-D9CF-40AE-B4C6-C98DA3205C09}" type="datetimeFigureOut">
               <a:rPr lang="en-US" smtClean="0"/>
               <a:pPr/>
-              <a:t>5/27/2025</a:t>
+              <a:t>5/28/2025</a:t>
             </a:fld>
             <a:endParaRPr lang="en-US"/>
           </a:p>
@@ -674,7 +674,7 @@
             <a:fld id="{1D8BD707-D9CF-40AE-B4C6-C98DA3205C09}" type="datetimeFigureOut">
               <a:rPr lang="en-US" smtClean="0"/>
               <a:pPr/>
-              <a:t>5/27/2025</a:t>
+              <a:t>5/28/2025</a:t>
             </a:fld>
             <a:endParaRPr lang="en-US"/>
           </a:p>
@@ -839,7 +839,7 @@
             <a:fld id="{1D8BD707-D9CF-40AE-B4C6-C98DA3205C09}" type="datetimeFigureOut">
               <a:rPr lang="en-US" smtClean="0"/>
               <a:pPr/>
-              <a:t>5/27/2025</a:t>
+              <a:t>5/28/2025</a:t>
             </a:fld>
             <a:endParaRPr lang="en-US"/>
           </a:p>
@@ -1081,7 +1081,7 @@
             <a:fld id="{1D8BD707-D9CF-40AE-B4C6-C98DA3205C09}" type="datetimeFigureOut">
               <a:rPr lang="en-US" smtClean="0"/>
               <a:pPr/>
-              <a:t>5/27/2025</a:t>
+              <a:t>5/28/2025</a:t>
             </a:fld>
             <a:endParaRPr lang="en-US"/>
           </a:p>
@@ -1363,7 +1363,7 @@
             <a:fld id="{1D8BD707-D9CF-40AE-B4C6-C98DA3205C09}" type="datetimeFigureOut">
               <a:rPr lang="en-US" smtClean="0"/>
               <a:pPr/>
-              <a:t>5/27/2025</a:t>
+              <a:t>5/28/2025</a:t>
             </a:fld>
             <a:endParaRPr lang="en-US"/>
           </a:p>
@@ -1779,7 +1779,7 @@
             <a:fld id="{1D8BD707-D9CF-40AE-B4C6-C98DA3205C09}" type="datetimeFigureOut">
               <a:rPr lang="en-US" smtClean="0"/>
               <a:pPr/>
-              <a:t>5/27/2025</a:t>
+              <a:t>5/28/2025</a:t>
             </a:fld>
             <a:endParaRPr lang="en-US"/>
           </a:p>
@@ -1893,7 +1893,7 @@
             <a:fld id="{1D8BD707-D9CF-40AE-B4C6-C98DA3205C09}" type="datetimeFigureOut">
               <a:rPr lang="en-US" smtClean="0"/>
               <a:pPr/>
-              <a:t>5/27/2025</a:t>
+              <a:t>5/28/2025</a:t>
             </a:fld>
             <a:endParaRPr lang="en-US"/>
           </a:p>
@@ -1985,7 +1985,7 @@
             <a:fld id="{1D8BD707-D9CF-40AE-B4C6-C98DA3205C09}" type="datetimeFigureOut">
               <a:rPr lang="en-US" smtClean="0"/>
               <a:pPr/>
-              <a:t>5/27/2025</a:t>
+              <a:t>5/28/2025</a:t>
             </a:fld>
             <a:endParaRPr lang="en-US"/>
           </a:p>
@@ -2257,7 +2257,7 @@
             <a:fld id="{1D8BD707-D9CF-40AE-B4C6-C98DA3205C09}" type="datetimeFigureOut">
               <a:rPr lang="en-US" smtClean="0"/>
               <a:pPr/>
-              <a:t>5/27/2025</a:t>
+              <a:t>5/28/2025</a:t>
             </a:fld>
             <a:endParaRPr lang="en-US"/>
           </a:p>
@@ -2506,7 +2506,7 @@
             <a:fld id="{1D8BD707-D9CF-40AE-B4C6-C98DA3205C09}" type="datetimeFigureOut">
               <a:rPr lang="en-US" smtClean="0"/>
               <a:pPr/>
-              <a:t>5/27/2025</a:t>
+              <a:t>5/28/2025</a:t>
             </a:fld>
             <a:endParaRPr lang="en-US"/>
           </a:p>
@@ -2714,7 +2714,7 @@
             <a:fld id="{1D8BD707-D9CF-40AE-B4C6-C98DA3205C09}" type="datetimeFigureOut">
               <a:rPr lang="en-US" smtClean="0"/>
               <a:pPr/>
-              <a:t>5/27/2025</a:t>
+              <a:t>5/28/2025</a:t>
             </a:fld>
             <a:endParaRPr lang="en-US"/>
           </a:p>
@@ -3440,6 +3440,18 @@
   <p:clrMapOvr>
     <a:masterClrMapping/>
   </p:clrMapOvr>
+  <mc:AlternateContent xmlns:mc="http://schemas.openxmlformats.org/markup-compatibility/2006">
+    <mc:Choice xmlns:p159="http://schemas.microsoft.com/office/powerpoint/2015/09/main" Requires="p159">
+      <p:transition xmlns:p14="http://schemas.microsoft.com/office/powerpoint/2010/main" spd="slow" p14:dur="2000">
+        <p159:morph option="byObject"/>
+      </p:transition>
+    </mc:Choice>
+    <mc:Fallback>
+      <p:transition spd="slow">
+        <p:fade/>
+      </p:transition>
+    </mc:Fallback>
+  </mc:AlternateContent>
 </p:sld>
 </file>
 
@@ -3670,9 +3682,18 @@
   <p:clrMapOvr>
     <a:masterClrMapping/>
   </p:clrMapOvr>
-  <p:transition>
-    <p:wipe/>
-  </p:transition>
+  <mc:AlternateContent xmlns:mc="http://schemas.openxmlformats.org/markup-compatibility/2006">
+    <mc:Choice xmlns:p159="http://schemas.microsoft.com/office/powerpoint/2015/09/main" Requires="p159">
+      <p:transition xmlns:p14="http://schemas.microsoft.com/office/powerpoint/2010/main" spd="slow" p14:dur="2000">
+        <p159:morph option="byObject"/>
+      </p:transition>
+    </mc:Choice>
+    <mc:Fallback>
+      <p:transition spd="slow">
+        <p:fade/>
+      </p:transition>
+    </mc:Fallback>
+  </mc:AlternateContent>
 </p:sld>
 </file>
 
@@ -4551,6 +4572,18 @@
   <p:clrMapOvr>
     <a:masterClrMapping/>
   </p:clrMapOvr>
+  <mc:AlternateContent xmlns:mc="http://schemas.openxmlformats.org/markup-compatibility/2006">
+    <mc:Choice xmlns:p159="http://schemas.microsoft.com/office/powerpoint/2015/09/main" Requires="p159">
+      <p:transition xmlns:p14="http://schemas.microsoft.com/office/powerpoint/2010/main" spd="slow" p14:dur="2000">
+        <p159:morph option="byObject"/>
+      </p:transition>
+    </mc:Choice>
+    <mc:Fallback>
+      <p:transition spd="slow">
+        <p:fade/>
+      </p:transition>
+    </mc:Fallback>
+  </mc:AlternateContent>
 </p:sld>
 </file>
 
@@ -5426,6 +5459,18 @@
   <p:clrMapOvr>
     <a:masterClrMapping/>
   </p:clrMapOvr>
+  <mc:AlternateContent xmlns:mc="http://schemas.openxmlformats.org/markup-compatibility/2006">
+    <mc:Choice xmlns:p159="http://schemas.microsoft.com/office/powerpoint/2015/09/main" Requires="p159">
+      <p:transition xmlns:p14="http://schemas.microsoft.com/office/powerpoint/2010/main" spd="slow" p14:dur="2000">
+        <p159:morph option="byObject"/>
+      </p:transition>
+    </mc:Choice>
+    <mc:Fallback>
+      <p:transition spd="slow">
+        <p:fade/>
+      </p:transition>
+    </mc:Fallback>
+  </mc:AlternateContent>
 </p:sld>
 </file>
 
@@ -6484,9 +6529,18 @@
   <p:clrMapOvr>
     <a:masterClrMapping/>
   </p:clrMapOvr>
-  <p:transition>
-    <p:wipe/>
-  </p:transition>
+  <mc:AlternateContent xmlns:mc="http://schemas.openxmlformats.org/markup-compatibility/2006">
+    <mc:Choice xmlns:p159="http://schemas.microsoft.com/office/powerpoint/2015/09/main" Requires="p159">
+      <p:transition xmlns:p14="http://schemas.microsoft.com/office/powerpoint/2010/main" spd="slow" p14:dur="2000">
+        <p159:morph option="byObject"/>
+      </p:transition>
+    </mc:Choice>
+    <mc:Fallback>
+      <p:transition spd="slow">
+        <p:fade/>
+      </p:transition>
+    </mc:Fallback>
+  </mc:AlternateContent>
 </p:sld>
 </file>
 
@@ -7545,9 +7599,18 @@
   <p:clrMapOvr>
     <a:masterClrMapping/>
   </p:clrMapOvr>
-  <p:transition>
-    <p:wipe/>
-  </p:transition>
+  <mc:AlternateContent xmlns:mc="http://schemas.openxmlformats.org/markup-compatibility/2006">
+    <mc:Choice xmlns:p159="http://schemas.microsoft.com/office/powerpoint/2015/09/main" Requires="p159">
+      <p:transition xmlns:p14="http://schemas.microsoft.com/office/powerpoint/2010/main" spd="slow" p14:dur="2000">
+        <p159:morph option="byObject"/>
+      </p:transition>
+    </mc:Choice>
+    <mc:Fallback>
+      <p:transition spd="slow">
+        <p:fade/>
+      </p:transition>
+    </mc:Fallback>
+  </mc:AlternateContent>
 </p:sld>
 </file>
 
@@ -8151,9 +8214,18 @@
   <p:clrMapOvr>
     <a:masterClrMapping/>
   </p:clrMapOvr>
-  <p:transition>
-    <p:wipe/>
-  </p:transition>
+  <mc:AlternateContent xmlns:mc="http://schemas.openxmlformats.org/markup-compatibility/2006">
+    <mc:Choice xmlns:p159="http://schemas.microsoft.com/office/powerpoint/2015/09/main" Requires="p159">
+      <p:transition xmlns:p14="http://schemas.microsoft.com/office/powerpoint/2010/main" spd="slow" p14:dur="2000">
+        <p159:morph option="byObject"/>
+      </p:transition>
+    </mc:Choice>
+    <mc:Fallback>
+      <p:transition spd="slow">
+        <p:fade/>
+      </p:transition>
+    </mc:Fallback>
+  </mc:AlternateContent>
 </p:sld>
 </file>
 
@@ -8598,9 +8670,18 @@
   <p:clrMapOvr>
     <a:masterClrMapping/>
   </p:clrMapOvr>
-  <p:transition>
-    <p:wipe/>
-  </p:transition>
+  <mc:AlternateContent xmlns:mc="http://schemas.openxmlformats.org/markup-compatibility/2006">
+    <mc:Choice xmlns:p159="http://schemas.microsoft.com/office/powerpoint/2015/09/main" Requires="p159">
+      <p:transition xmlns:p14="http://schemas.microsoft.com/office/powerpoint/2010/main" spd="slow" p14:dur="2000">
+        <p159:morph option="byObject"/>
+      </p:transition>
+    </mc:Choice>
+    <mc:Fallback>
+      <p:transition spd="slow">
+        <p:fade/>
+      </p:transition>
+    </mc:Fallback>
+  </mc:AlternateContent>
 </p:sld>
 </file>
 
@@ -9254,9 +9335,18 @@
   <p:clrMapOvr>
     <a:masterClrMapping/>
   </p:clrMapOvr>
-  <p:transition>
-    <p:wipe/>
-  </p:transition>
+  <mc:AlternateContent xmlns:mc="http://schemas.openxmlformats.org/markup-compatibility/2006">
+    <mc:Choice xmlns:p159="http://schemas.microsoft.com/office/powerpoint/2015/09/main" Requires="p159">
+      <p:transition xmlns:p14="http://schemas.microsoft.com/office/powerpoint/2010/main" spd="slow" p14:dur="2000">
+        <p159:morph option="byObject"/>
+      </p:transition>
+    </mc:Choice>
+    <mc:Fallback>
+      <p:transition spd="slow">
+        <p:fade/>
+      </p:transition>
+    </mc:Fallback>
+  </mc:AlternateContent>
 </p:sld>
 </file>
 
@@ -10342,9 +10432,18 @@
   <p:clrMapOvr>
     <a:masterClrMapping/>
   </p:clrMapOvr>
-  <p:transition>
-    <p:wipe/>
-  </p:transition>
+  <mc:AlternateContent xmlns:mc="http://schemas.openxmlformats.org/markup-compatibility/2006">
+    <mc:Choice xmlns:p159="http://schemas.microsoft.com/office/powerpoint/2015/09/main" Requires="p159">
+      <p:transition xmlns:p14="http://schemas.microsoft.com/office/powerpoint/2010/main" spd="slow" p14:dur="2000">
+        <p159:morph option="byObject"/>
+      </p:transition>
+    </mc:Choice>
+    <mc:Fallback>
+      <p:transition spd="slow">
+        <p:fade/>
+      </p:transition>
+    </mc:Fallback>
+  </mc:AlternateContent>
 </p:sld>
 </file>
 
